--- a/M&A承継機構_会社紹介パンフレット/M&A承継機構_会社紹介パンフレット_TSR配布用_260802.pptx
+++ b/M&A承継機構_会社紹介パンフレット/M&A承継機構_会社紹介パンフレット_TSR配布用_260802.pptx
@@ -966,7 +966,7 @@
       </p:grpSpPr>
       <p:pic>
         <p:nvPicPr>
-          <p:cNvPr id="2" name="Image 0" descr="assets/photo_hero.jpg">    </p:cNvPr>
+          <p:cNvPr id="2" name="Image 0" descr="assets/hero_cover.jpg">    </p:cNvPr>
           <p:cNvPicPr>
             <a:picLocks noChangeAspect="1"/>
           </p:cNvPicPr>
@@ -979,8 +979,8 @@
         </p:blipFill>
         <p:spPr>
           <a:xfrm>
-            <a:off x="7559985" y="5827133"/>
-            <a:ext cx="7559985" cy="4864854"/>
+            <a:off x="7559985" y="0"/>
+            <a:ext cx="7559985" cy="10691988"/>
           </a:xfrm>
           <a:prstGeom prst="rect">
             <a:avLst/>
@@ -989,7 +989,7 @@
       </p:pic>
       <p:pic>
         <p:nvPicPr>
-          <p:cNvPr id="3" name="Image 1" descr="assets/scrim_cover.png">    </p:cNvPr>
+          <p:cNvPr id="3" name="Image 1" descr="assets/scrim_top.png">    </p:cNvPr>
           <p:cNvPicPr>
             <a:picLocks noChangeAspect="1"/>
           </p:cNvPicPr>
@@ -1003,8 +1003,8 @@
         </p:blipFill>
         <p:spPr>
           <a:xfrm>
-            <a:off x="7559985" y="5827133"/>
-            <a:ext cx="7559985" cy="4864854"/>
+            <a:off x="7559985" y="0"/>
+            <a:ext cx="7559985" cy="4490635"/>
           </a:xfrm>
           <a:prstGeom prst="rect">
             <a:avLst/>
@@ -1013,7 +1013,7 @@
       </p:pic>
       <p:pic>
         <p:nvPicPr>
-          <p:cNvPr id="4" name="Image 2" descr="assets/logo_navy.png">    </p:cNvPr>
+          <p:cNvPr id="4" name="Image 2" descr="assets/scrim_cover.png">    </p:cNvPr>
           <p:cNvPicPr>
             <a:picLocks noChangeAspect="1"/>
           </p:cNvPicPr>
@@ -1027,56 +1027,17 @@
         </p:blipFill>
         <p:spPr>
           <a:xfrm>
-            <a:off x="8126913" y="548640"/>
-            <a:ext cx="2212848" cy="438912"/>
+            <a:off x="7559985" y="0"/>
+            <a:ext cx="7559985" cy="10691988"/>
           </a:xfrm>
           <a:prstGeom prst="rect">
             <a:avLst/>
           </a:prstGeom>
         </p:spPr>
       </p:pic>
-      <p:sp>
-        <p:nvSpPr>
-          <p:cNvPr id="5" name="Text 0"/>
-          <p:cNvSpPr/>
-          <p:nvPr/>
-        </p:nvSpPr>
-        <p:spPr>
-          <a:xfrm>
-            <a:off x="11809842" y="658368"/>
-            <a:ext cx="2743200" cy="201168"/>
-          </a:xfrm>
-          <a:prstGeom prst="rect">
-            <a:avLst/>
-          </a:prstGeom>
-          <a:noFill/>
-          <a:ln/>
-        </p:spPr>
-        <p:txBody>
-          <a:bodyPr wrap="square" lIns="0" tIns="0" rIns="0" bIns="0" rtlCol="0" anchor="ctr"/>
-          <a:lstStyle/>
-          <a:p>
-            <a:pPr algn="r" indent="0" marL="0">
-              <a:buNone/>
-            </a:pPr>
-            <a:r>
-              <a:rPr lang="en-US" sz="800" b="1" spc="220" kern="0" dirty="0">
-                <a:solidFill>
-                  <a:srgbClr val="8A959D"/>
-                </a:solidFill>
-                <a:latin typeface="Arial" pitchFamily="34" charset="0"/>
-                <a:ea typeface="游ゴシック" pitchFamily="34" charset="-122"/>
-                <a:cs typeface="Arial" pitchFamily="34" charset="-120"/>
-              </a:rPr>
-              <a:t>COMPANY PROFILE</a:t>
-            </a:r>
-            <a:endParaRPr lang="en-US" sz="800" dirty="0"/>
-          </a:p>
-        </p:txBody>
-      </p:sp>
       <p:pic>
         <p:nvPicPr>
-          <p:cNvPr id="6" name="Image 3" descr="assets/mark_mint.png">    </p:cNvPr>
+          <p:cNvPr id="5" name="Image 3" descr="assets/logo_knockout.png">    </p:cNvPr>
           <p:cNvPicPr>
             <a:picLocks noChangeAspect="1"/>
           </p:cNvPicPr>
@@ -1090,8 +1051,8 @@
         </p:blipFill>
         <p:spPr>
           <a:xfrm>
-            <a:off x="8126913" y="1794053"/>
-            <a:ext cx="96012" cy="96012"/>
+            <a:off x="8126913" y="548640"/>
+            <a:ext cx="2304288" cy="457200"/>
           </a:xfrm>
           <a:prstGeom prst="rect">
             <a:avLst/>
@@ -1100,223 +1061,46 @@
       </p:pic>
       <p:sp>
         <p:nvSpPr>
-          <p:cNvPr id="7" name="Text 1"/>
-          <p:cNvSpPr/>
-          <p:nvPr/>
-        </p:nvSpPr>
-        <p:spPr>
-          <a:xfrm>
-            <a:off x="8282361" y="1746504"/>
-            <a:ext cx="3840480" cy="182880"/>
-          </a:xfrm>
-          <a:prstGeom prst="rect">
-            <a:avLst/>
-          </a:prstGeom>
-          <a:noFill/>
-          <a:ln/>
-        </p:spPr>
-        <p:txBody>
-          <a:bodyPr wrap="square" lIns="0" tIns="0" rIns="0" bIns="0" rtlCol="0" anchor="ctr"/>
-          <a:lstStyle/>
-          <a:p>
-            <a:pPr indent="0" marL="0">
-              <a:buNone/>
-            </a:pPr>
-            <a:r>
-              <a:rPr lang="en-US" sz="800" b="1" spc="240" kern="0" dirty="0">
-                <a:solidFill>
-                  <a:srgbClr val="2E9C87"/>
+          <p:cNvPr id="6" name="Text 0"/>
+          <p:cNvSpPr/>
+          <p:nvPr/>
+        </p:nvSpPr>
+        <p:spPr>
+          <a:xfrm>
+            <a:off x="11809842" y="667512"/>
+            <a:ext cx="2743200" cy="201168"/>
+          </a:xfrm>
+          <a:prstGeom prst="rect">
+            <a:avLst/>
+          </a:prstGeom>
+          <a:noFill/>
+          <a:ln/>
+        </p:spPr>
+        <p:txBody>
+          <a:bodyPr wrap="square" lIns="0" tIns="0" rIns="0" bIns="0" rtlCol="0" anchor="ctr"/>
+          <a:lstStyle/>
+          <a:p>
+            <a:pPr algn="r" indent="0" marL="0">
+              <a:buNone/>
+            </a:pPr>
+            <a:r>
+              <a:rPr lang="en-US" sz="800" b="1" spc="220" kern="0" dirty="0">
+                <a:solidFill>
+                  <a:srgbClr val="9FB4BD"/>
                 </a:solidFill>
                 <a:latin typeface="Arial" pitchFamily="34" charset="0"/>
                 <a:ea typeface="游ゴシック" pitchFamily="34" charset="-122"/>
                 <a:cs typeface="Arial" pitchFamily="34" charset="-120"/>
               </a:rPr>
-              <a:t>M&amp;A ADVISORY &amp; BUSINESS SUCCESSION</a:t>
+              <a:t>COMPANY PROFILE</a:t>
             </a:r>
             <a:endParaRPr lang="en-US" sz="800" dirty="0"/>
-          </a:p>
-        </p:txBody>
-      </p:sp>
-      <p:sp>
-        <p:nvSpPr>
-          <p:cNvPr id="8" name="Text 2"/>
-          <p:cNvSpPr/>
-          <p:nvPr/>
-        </p:nvSpPr>
-        <p:spPr>
-          <a:xfrm>
-            <a:off x="8126913" y="2139696"/>
-            <a:ext cx="6426129" cy="2103120"/>
-          </a:xfrm>
-          <a:prstGeom prst="rect">
-            <a:avLst/>
-          </a:prstGeom>
-          <a:noFill/>
-          <a:ln/>
-        </p:spPr>
-        <p:txBody>
-          <a:bodyPr wrap="square" lIns="0" tIns="0" rIns="0" bIns="0" rtlCol="0" anchor="ctr"/>
-          <a:lstStyle/>
-          <a:p>
-            <a:pPr indent="0" marL="0">
-              <a:lnSpc>
-                <a:spcPct val="130000"/>
-              </a:lnSpc>
-              <a:buNone/>
-            </a:pPr>
-            <a:r>
-              <a:rPr lang="en-US" sz="3300" b="1" dirty="0">
-                <a:solidFill>
-                  <a:srgbClr val="0B3041"/>
-                </a:solidFill>
-                <a:latin typeface="游ゴシック Medium" pitchFamily="34" charset="0"/>
-                <a:ea typeface="游ゴシック Medium" pitchFamily="34" charset="-122"/>
-                <a:cs typeface="游ゴシック Medium" pitchFamily="34" charset="-120"/>
-              </a:rPr>
-              <a:t>会社の未来を、</a:t>
-            </a:r>
-            <a:endParaRPr lang="en-US" sz="3300" dirty="0"/>
-          </a:p>
-          <a:p>
-            <a:pPr indent="0" marL="0">
-              <a:lnSpc>
-                <a:spcPct val="130000"/>
-              </a:lnSpc>
-              <a:buNone/>
-            </a:pPr>
-            <a:r>
-              <a:rPr lang="en-US" sz="3300" b="1" dirty="0">
-                <a:solidFill>
-                  <a:srgbClr val="0B3041"/>
-                </a:solidFill>
-                <a:latin typeface="游ゴシック Medium" pitchFamily="34" charset="0"/>
-                <a:ea typeface="游ゴシック Medium" pitchFamily="34" charset="-122"/>
-                <a:cs typeface="游ゴシック Medium" pitchFamily="34" charset="-120"/>
-              </a:rPr>
-              <a:t>次の成長へつなぐ。</a:t>
-            </a:r>
-            <a:endParaRPr lang="en-US" sz="3300" dirty="0"/>
-          </a:p>
-        </p:txBody>
-      </p:sp>
-      <p:sp>
-        <p:nvSpPr>
-          <p:cNvPr id="9" name="Text 3"/>
-          <p:cNvSpPr/>
-          <p:nvPr/>
-        </p:nvSpPr>
-        <p:spPr>
-          <a:xfrm>
-            <a:off x="8126913" y="4334256"/>
-            <a:ext cx="6426129" cy="694944"/>
-          </a:xfrm>
-          <a:prstGeom prst="rect">
-            <a:avLst/>
-          </a:prstGeom>
-          <a:noFill/>
-          <a:ln/>
-        </p:spPr>
-        <p:txBody>
-          <a:bodyPr wrap="square" lIns="0" tIns="0" rIns="0" bIns="0" rtlCol="0" anchor="ctr"/>
-          <a:lstStyle/>
-          <a:p>
-            <a:pPr indent="0" marL="0">
-              <a:lnSpc>
-                <a:spcPct val="155000"/>
-              </a:lnSpc>
-              <a:buNone/>
-            </a:pPr>
-            <a:r>
-              <a:rPr lang="en-US" sz="1050" dirty="0">
-                <a:solidFill>
-                  <a:srgbClr val="5A6670"/>
-                </a:solidFill>
-                <a:latin typeface="游ゴシック" pitchFamily="34" charset="0"/>
-                <a:ea typeface="游ゴシック" pitchFamily="34" charset="-122"/>
-                <a:cs typeface="游ゴシック" pitchFamily="34" charset="-120"/>
-              </a:rPr>
-              <a:t>事業承継、成長戦略、資本提携。</a:t>
-            </a:r>
-            <a:endParaRPr lang="en-US" sz="1050" dirty="0"/>
-          </a:p>
-          <a:p>
-            <a:pPr indent="0" marL="0">
-              <a:lnSpc>
-                <a:spcPct val="155000"/>
-              </a:lnSpc>
-              <a:buNone/>
-            </a:pPr>
-            <a:r>
-              <a:rPr lang="en-US" sz="1050" dirty="0">
-                <a:solidFill>
-                  <a:srgbClr val="5A6670"/>
-                </a:solidFill>
-                <a:latin typeface="游ゴシック" pitchFamily="34" charset="0"/>
-                <a:ea typeface="游ゴシック" pitchFamily="34" charset="-122"/>
-                <a:cs typeface="游ゴシック" pitchFamily="34" charset="-120"/>
-              </a:rPr>
-              <a:t>経営者の想いに寄り添い、最適な選択肢をご提案します。</a:t>
-            </a:r>
-            <a:endParaRPr lang="en-US" sz="1050" dirty="0"/>
-          </a:p>
-        </p:txBody>
-      </p:sp>
-      <p:sp>
-        <p:nvSpPr>
-          <p:cNvPr id="10" name="Text 4"/>
-          <p:cNvSpPr/>
-          <p:nvPr/>
-        </p:nvSpPr>
-        <p:spPr>
-          <a:xfrm>
-            <a:off x="8126913" y="5157216"/>
-            <a:ext cx="6426129" cy="219456"/>
-          </a:xfrm>
-          <a:prstGeom prst="rect">
-            <a:avLst/>
-          </a:prstGeom>
-          <a:noFill/>
-          <a:ln/>
-        </p:spPr>
-        <p:txBody>
-          <a:bodyPr wrap="square" lIns="0" tIns="0" rIns="0" bIns="0" rtlCol="0" anchor="ctr"/>
-          <a:lstStyle/>
-          <a:p>
-            <a:pPr indent="0" marL="0">
-              <a:buNone/>
-            </a:pPr>
-            <a:r>
-              <a:rPr lang="en-US" sz="850" b="1" dirty="0">
-                <a:solidFill>
-                  <a:srgbClr val="0B3041"/>
-                </a:solidFill>
-                <a:latin typeface="游ゴシック" pitchFamily="34" charset="0"/>
-                <a:ea typeface="游ゴシック" pitchFamily="34" charset="-122"/>
-                <a:cs typeface="游ゴシック" pitchFamily="34" charset="-120"/>
-              </a:rPr>
-              <a:t>株式会社TWOSTONE&amp;Sons</a:t>
-            </a:r>
-            <a:pPr indent="0" marL="0">
-              <a:buNone/>
-            </a:pPr>
-            <a:r>
-              <a:rPr lang="en-US" sz="850" dirty="0">
-                <a:solidFill>
-                  <a:srgbClr val="5A6670"/>
-                </a:solidFill>
-                <a:latin typeface="游ゴシック" pitchFamily="34" charset="0"/>
-                <a:ea typeface="游ゴシック" pitchFamily="34" charset="-122"/>
-                <a:cs typeface="游ゴシック" pitchFamily="34" charset="-120"/>
-              </a:rPr>
-              <a:t>（東証グロース・証券コード 7352）グループ</a:t>
-            </a:r>
-            <a:endParaRPr lang="en-US" sz="850" dirty="0"/>
           </a:p>
         </p:txBody>
       </p:sp>
       <p:pic>
         <p:nvPicPr>
-          <p:cNvPr id="11" name="Image 4" descr="assets/logo_knockout.png">    </p:cNvPr>
+          <p:cNvPr id="7" name="Image 4" descr="assets/mark_mint.png">    </p:cNvPr>
           <p:cNvPicPr>
             <a:picLocks noChangeAspect="1"/>
           </p:cNvPicPr>
@@ -1330,8 +1114,8 @@
         </p:blipFill>
         <p:spPr>
           <a:xfrm>
-            <a:off x="8126913" y="7930500"/>
-            <a:ext cx="2084832" cy="413309"/>
+            <a:off x="8126913" y="4866437"/>
+            <a:ext cx="96012" cy="96012"/>
           </a:xfrm>
           <a:prstGeom prst="rect">
             <a:avLst/>
@@ -1340,30 +1124,72 @@
       </p:pic>
       <p:sp>
         <p:nvSpPr>
-          <p:cNvPr id="12" name="Text 5"/>
-          <p:cNvSpPr/>
-          <p:nvPr/>
-        </p:nvSpPr>
-        <p:spPr>
-          <a:xfrm>
-            <a:off x="8126913" y="8534004"/>
-            <a:ext cx="6426129" cy="310896"/>
-          </a:xfrm>
-          <a:prstGeom prst="rect">
-            <a:avLst/>
-          </a:prstGeom>
-          <a:noFill/>
-          <a:ln/>
-        </p:spPr>
-        <p:txBody>
-          <a:bodyPr wrap="square" lIns="0" tIns="0" rIns="0" bIns="0" rtlCol="0" anchor="ctr"/>
-          <a:lstStyle/>
-          <a:p>
-            <a:pPr indent="0" marL="0">
-              <a:buNone/>
-            </a:pPr>
-            <a:r>
-              <a:rPr lang="en-US" sz="1300" b="1" dirty="0">
+          <p:cNvPr id="8" name="Text 1"/>
+          <p:cNvSpPr/>
+          <p:nvPr/>
+        </p:nvSpPr>
+        <p:spPr>
+          <a:xfrm>
+            <a:off x="8282361" y="4818888"/>
+            <a:ext cx="3840480" cy="182880"/>
+          </a:xfrm>
+          <a:prstGeom prst="rect">
+            <a:avLst/>
+          </a:prstGeom>
+          <a:noFill/>
+          <a:ln/>
+        </p:spPr>
+        <p:txBody>
+          <a:bodyPr wrap="square" lIns="0" tIns="0" rIns="0" bIns="0" rtlCol="0" anchor="ctr"/>
+          <a:lstStyle/>
+          <a:p>
+            <a:pPr indent="0" marL="0">
+              <a:buNone/>
+            </a:pPr>
+            <a:r>
+              <a:rPr lang="en-US" sz="800" b="1" spc="240" kern="0" dirty="0">
+                <a:solidFill>
+                  <a:srgbClr val="54CCB3"/>
+                </a:solidFill>
+                <a:latin typeface="Arial" pitchFamily="34" charset="0"/>
+                <a:ea typeface="游ゴシック" pitchFamily="34" charset="-122"/>
+                <a:cs typeface="Arial" pitchFamily="34" charset="-120"/>
+              </a:rPr>
+              <a:t>M&amp;A ADVISORY &amp; BUSINESS SUCCESSION</a:t>
+            </a:r>
+            <a:endParaRPr lang="en-US" sz="800" dirty="0"/>
+          </a:p>
+        </p:txBody>
+      </p:sp>
+      <p:sp>
+        <p:nvSpPr>
+          <p:cNvPr id="9" name="Text 2"/>
+          <p:cNvSpPr/>
+          <p:nvPr/>
+        </p:nvSpPr>
+        <p:spPr>
+          <a:xfrm>
+            <a:off x="8126913" y="5212080"/>
+            <a:ext cx="6426129" cy="1920240"/>
+          </a:xfrm>
+          <a:prstGeom prst="rect">
+            <a:avLst/>
+          </a:prstGeom>
+          <a:noFill/>
+          <a:ln/>
+        </p:spPr>
+        <p:txBody>
+          <a:bodyPr wrap="square" lIns="0" tIns="0" rIns="0" bIns="0" rtlCol="0" anchor="ctr"/>
+          <a:lstStyle/>
+          <a:p>
+            <a:pPr indent="0" marL="0">
+              <a:lnSpc>
+                <a:spcPct val="126000"/>
+              </a:lnSpc>
+              <a:buNone/>
+            </a:pPr>
+            <a:r>
+              <a:rPr lang="en-US" sz="3700" b="1" dirty="0">
                 <a:solidFill>
                   <a:srgbClr val="FFFFFF"/>
                 </a:solidFill>
@@ -1371,85 +1197,97 @@
                 <a:ea typeface="游ゴシック Medium" pitchFamily="34" charset="-122"/>
                 <a:cs typeface="游ゴシック Medium" pitchFamily="34" charset="-120"/>
               </a:rPr>
-              <a:t>企業価値の最大化を通じて、経済に正しい循環を。</a:t>
-            </a:r>
-            <a:endParaRPr lang="en-US" sz="1300" dirty="0"/>
-          </a:p>
-        </p:txBody>
-      </p:sp>
-      <p:sp>
-        <p:nvSpPr>
-          <p:cNvPr id="13" name="Shape 6"/>
-          <p:cNvSpPr/>
-          <p:nvPr/>
-        </p:nvSpPr>
-        <p:spPr>
-          <a:xfrm>
-            <a:off x="8126913" y="9210660"/>
-            <a:ext cx="4498848" cy="384048"/>
-          </a:xfrm>
-          <a:prstGeom prst="roundRect">
-            <a:avLst>
-              <a:gd name="adj" fmla="val 50000"/>
-            </a:avLst>
-          </a:prstGeom>
-          <a:solidFill>
-            <a:srgbClr val="FFFFFF">
-              <a:alpha val="14000"/>
-            </a:srgbClr>
-          </a:solidFill>
-          <a:ln w="7620">
-            <a:solidFill>
-              <a:srgbClr val="FFFFFF">
-                <a:alpha val="45000"/>
-              </a:srgbClr>
-            </a:solidFill>
-            <a:prstDash val="solid"/>
-          </a:ln>
-        </p:spPr>
-      </p:sp>
-      <p:sp>
-        <p:nvSpPr>
-          <p:cNvPr id="14" name="Text 7"/>
-          <p:cNvSpPr/>
-          <p:nvPr/>
-        </p:nvSpPr>
-        <p:spPr>
-          <a:xfrm>
-            <a:off x="8328081" y="9210660"/>
-            <a:ext cx="4114800" cy="384048"/>
-          </a:xfrm>
-          <a:prstGeom prst="rect">
-            <a:avLst/>
-          </a:prstGeom>
-          <a:noFill/>
-          <a:ln/>
-        </p:spPr>
-        <p:txBody>
-          <a:bodyPr wrap="square" lIns="0" tIns="0" rIns="0" bIns="0" rtlCol="0" anchor="ctr"/>
-          <a:lstStyle/>
-          <a:p>
-            <a:pPr indent="0" marL="0">
-              <a:buNone/>
-            </a:pPr>
-            <a:r>
-              <a:rPr lang="en-US" sz="850" dirty="0">
+              <a:t>会社の未来を、</a:t>
+            </a:r>
+            <a:endParaRPr lang="en-US" sz="3700" dirty="0"/>
+          </a:p>
+          <a:p>
+            <a:pPr indent="0" marL="0">
+              <a:lnSpc>
+                <a:spcPct val="126000"/>
+              </a:lnSpc>
+              <a:buNone/>
+            </a:pPr>
+            <a:r>
+              <a:rPr lang="en-US" sz="3700" b="1" dirty="0">
                 <a:solidFill>
                   <a:srgbClr val="FFFFFF"/>
                 </a:solidFill>
+                <a:latin typeface="游ゴシック Medium" pitchFamily="34" charset="0"/>
+                <a:ea typeface="游ゴシック Medium" pitchFamily="34" charset="-122"/>
+                <a:cs typeface="游ゴシック Medium" pitchFamily="34" charset="-120"/>
+              </a:rPr>
+              <a:t>次の成長へつなぐ。</a:t>
+            </a:r>
+            <a:endParaRPr lang="en-US" sz="3700" dirty="0"/>
+          </a:p>
+        </p:txBody>
+      </p:sp>
+      <p:sp>
+        <p:nvSpPr>
+          <p:cNvPr id="10" name="Text 3"/>
+          <p:cNvSpPr/>
+          <p:nvPr/>
+        </p:nvSpPr>
+        <p:spPr>
+          <a:xfrm>
+            <a:off x="8126913" y="7260336"/>
+            <a:ext cx="6426129" cy="731520"/>
+          </a:xfrm>
+          <a:prstGeom prst="rect">
+            <a:avLst/>
+          </a:prstGeom>
+          <a:noFill/>
+          <a:ln/>
+        </p:spPr>
+        <p:txBody>
+          <a:bodyPr wrap="square" lIns="0" tIns="0" rIns="0" bIns="0" rtlCol="0" anchor="ctr"/>
+          <a:lstStyle/>
+          <a:p>
+            <a:pPr indent="0" marL="0">
+              <a:lnSpc>
+                <a:spcPct val="158000"/>
+              </a:lnSpc>
+              <a:buNone/>
+            </a:pPr>
+            <a:r>
+              <a:rPr lang="en-US" sz="1100" dirty="0">
+                <a:solidFill>
+                  <a:srgbClr val="C6D7DE"/>
+                </a:solidFill>
                 <a:latin typeface="游ゴシック" pitchFamily="34" charset="0"/>
                 <a:ea typeface="游ゴシック" pitchFamily="34" charset="-122"/>
                 <a:cs typeface="游ゴシック" pitchFamily="34" charset="-120"/>
               </a:rPr>
-              <a:t>本資料は東京商工リサーチのご担当者様を通じてご案内しています</a:t>
-            </a:r>
-            <a:endParaRPr lang="en-US" sz="850" dirty="0"/>
+              <a:t>事業承継、成長戦略、資本提携。</a:t>
+            </a:r>
+            <a:endParaRPr lang="en-US" sz="1100" dirty="0"/>
+          </a:p>
+          <a:p>
+            <a:pPr indent="0" marL="0">
+              <a:lnSpc>
+                <a:spcPct val="158000"/>
+              </a:lnSpc>
+              <a:buNone/>
+            </a:pPr>
+            <a:r>
+              <a:rPr lang="en-US" sz="1100" dirty="0">
+                <a:solidFill>
+                  <a:srgbClr val="C6D7DE"/>
+                </a:solidFill>
+                <a:latin typeface="游ゴシック" pitchFamily="34" charset="0"/>
+                <a:ea typeface="游ゴシック" pitchFamily="34" charset="-122"/>
+                <a:cs typeface="游ゴシック" pitchFamily="34" charset="-120"/>
+              </a:rPr>
+              <a:t>経営者の想いに寄り添い、最適な選択肢をご提案します。</a:t>
+            </a:r>
+            <a:endParaRPr lang="en-US" sz="1100" dirty="0"/>
           </a:p>
         </p:txBody>
       </p:sp>
       <p:pic>
         <p:nvPicPr>
-          <p:cNvPr id="15" name="Image 5" descr="assets/mark_mint.png">    </p:cNvPr>
+          <p:cNvPr id="11" name="Image 5" descr="assets/rule_accent.png">    </p:cNvPr>
           <p:cNvPicPr>
             <a:picLocks noChangeAspect="1"/>
           </p:cNvPicPr>
@@ -1463,6 +1301,192 @@
         </p:blipFill>
         <p:spPr>
           <a:xfrm>
+            <a:off x="8126913" y="8247888"/>
+            <a:ext cx="1188720" cy="27432"/>
+          </a:xfrm>
+          <a:prstGeom prst="rect">
+            <a:avLst/>
+          </a:prstGeom>
+        </p:spPr>
+      </p:pic>
+      <p:sp>
+        <p:nvSpPr>
+          <p:cNvPr id="12" name="Text 4"/>
+          <p:cNvSpPr/>
+          <p:nvPr/>
+        </p:nvSpPr>
+        <p:spPr>
+          <a:xfrm>
+            <a:off x="8126913" y="8467344"/>
+            <a:ext cx="6426129" cy="292608"/>
+          </a:xfrm>
+          <a:prstGeom prst="rect">
+            <a:avLst/>
+          </a:prstGeom>
+          <a:noFill/>
+          <a:ln/>
+        </p:spPr>
+        <p:txBody>
+          <a:bodyPr wrap="square" lIns="0" tIns="0" rIns="0" bIns="0" rtlCol="0" anchor="ctr"/>
+          <a:lstStyle/>
+          <a:p>
+            <a:pPr indent="0" marL="0">
+              <a:buNone/>
+            </a:pPr>
+            <a:r>
+              <a:rPr lang="en-US" sz="1250" b="1" dirty="0">
+                <a:solidFill>
+                  <a:srgbClr val="54CCB3"/>
+                </a:solidFill>
+                <a:latin typeface="游ゴシック Medium" pitchFamily="34" charset="0"/>
+                <a:ea typeface="游ゴシック Medium" pitchFamily="34" charset="-122"/>
+                <a:cs typeface="游ゴシック Medium" pitchFamily="34" charset="-120"/>
+              </a:rPr>
+              <a:t>企業価値の最大化を通じて、経済に正しい循環を。</a:t>
+            </a:r>
+            <a:endParaRPr lang="en-US" sz="1250" dirty="0"/>
+          </a:p>
+        </p:txBody>
+      </p:sp>
+      <p:sp>
+        <p:nvSpPr>
+          <p:cNvPr id="13" name="Text 5"/>
+          <p:cNvSpPr/>
+          <p:nvPr/>
+        </p:nvSpPr>
+        <p:spPr>
+          <a:xfrm>
+            <a:off x="8126913" y="9015984"/>
+            <a:ext cx="6426129" cy="219456"/>
+          </a:xfrm>
+          <a:prstGeom prst="rect">
+            <a:avLst/>
+          </a:prstGeom>
+          <a:noFill/>
+          <a:ln/>
+        </p:spPr>
+        <p:txBody>
+          <a:bodyPr wrap="square" lIns="0" tIns="0" rIns="0" bIns="0" rtlCol="0" anchor="ctr"/>
+          <a:lstStyle/>
+          <a:p>
+            <a:pPr indent="0" marL="0">
+              <a:buNone/>
+            </a:pPr>
+            <a:r>
+              <a:rPr lang="en-US" sz="850" b="1" dirty="0">
+                <a:solidFill>
+                  <a:srgbClr val="FFFFFF"/>
+                </a:solidFill>
+                <a:latin typeface="游ゴシック" pitchFamily="34" charset="0"/>
+                <a:ea typeface="游ゴシック" pitchFamily="34" charset="-122"/>
+                <a:cs typeface="游ゴシック" pitchFamily="34" charset="-120"/>
+              </a:rPr>
+              <a:t>株式会社TWOSTONE&amp;Sons</a:t>
+            </a:r>
+            <a:pPr indent="0" marL="0">
+              <a:buNone/>
+            </a:pPr>
+            <a:r>
+              <a:rPr lang="en-US" sz="850" dirty="0">
+                <a:solidFill>
+                  <a:srgbClr val="A9BEC7"/>
+                </a:solidFill>
+                <a:latin typeface="游ゴシック" pitchFamily="34" charset="0"/>
+                <a:ea typeface="游ゴシック" pitchFamily="34" charset="-122"/>
+                <a:cs typeface="游ゴシック" pitchFamily="34" charset="-120"/>
+              </a:rPr>
+              <a:t>（東証グロース・証券コード 7352）グループ</a:t>
+            </a:r>
+            <a:endParaRPr lang="en-US" sz="850" dirty="0"/>
+          </a:p>
+        </p:txBody>
+      </p:sp>
+      <p:sp>
+        <p:nvSpPr>
+          <p:cNvPr id="14" name="Shape 6"/>
+          <p:cNvSpPr/>
+          <p:nvPr/>
+        </p:nvSpPr>
+        <p:spPr>
+          <a:xfrm>
+            <a:off x="8126913" y="9722724"/>
+            <a:ext cx="4498848" cy="402336"/>
+          </a:xfrm>
+          <a:prstGeom prst="roundRect">
+            <a:avLst>
+              <a:gd name="adj" fmla="val 50000"/>
+            </a:avLst>
+          </a:prstGeom>
+          <a:solidFill>
+            <a:srgbClr val="FFFFFF">
+              <a:alpha val="12000"/>
+            </a:srgbClr>
+          </a:solidFill>
+          <a:ln w="7620">
+            <a:solidFill>
+              <a:srgbClr val="FFFFFF">
+                <a:alpha val="42000"/>
+              </a:srgbClr>
+            </a:solidFill>
+            <a:prstDash val="solid"/>
+          </a:ln>
+        </p:spPr>
+      </p:sp>
+      <p:sp>
+        <p:nvSpPr>
+          <p:cNvPr id="15" name="Text 7"/>
+          <p:cNvSpPr/>
+          <p:nvPr/>
+        </p:nvSpPr>
+        <p:spPr>
+          <a:xfrm>
+            <a:off x="8346369" y="9722724"/>
+            <a:ext cx="4114800" cy="402336"/>
+          </a:xfrm>
+          <a:prstGeom prst="rect">
+            <a:avLst/>
+          </a:prstGeom>
+          <a:noFill/>
+          <a:ln/>
+        </p:spPr>
+        <p:txBody>
+          <a:bodyPr wrap="square" lIns="0" tIns="0" rIns="0" bIns="0" rtlCol="0" anchor="ctr"/>
+          <a:lstStyle/>
+          <a:p>
+            <a:pPr indent="0" marL="0">
+              <a:buNone/>
+            </a:pPr>
+            <a:r>
+              <a:rPr lang="en-US" sz="850" dirty="0">
+                <a:solidFill>
+                  <a:srgbClr val="FFFFFF"/>
+                </a:solidFill>
+                <a:latin typeface="游ゴシック" pitchFamily="34" charset="0"/>
+                <a:ea typeface="游ゴシック" pitchFamily="34" charset="-122"/>
+                <a:cs typeface="游ゴシック" pitchFamily="34" charset="-120"/>
+              </a:rPr>
+              <a:t>本資料は東京商工リサーチのご担当者様を通じてご案内しています</a:t>
+            </a:r>
+            <a:endParaRPr lang="en-US" sz="850" dirty="0"/>
+          </a:p>
+        </p:txBody>
+      </p:sp>
+      <p:pic>
+        <p:nvPicPr>
+          <p:cNvPr id="16" name="Image 6" descr="assets/mark_mint.png">    </p:cNvPr>
+          <p:cNvPicPr>
+            <a:picLocks noChangeAspect="1"/>
+          </p:cNvPicPr>
+          <p:nvPr/>
+        </p:nvPicPr>
+        <p:blipFill>
+          <a:blip r:embed="rId7"/>
+          <a:stretch>
+            <a:fillRect/>
+          </a:stretch>
+        </p:blipFill>
+        <p:spPr>
+          <a:xfrm>
             <a:off x="566928" y="587045"/>
             <a:ext cx="96012" cy="96012"/>
           </a:xfrm>
@@ -1473,7 +1497,7 @@
       </p:pic>
       <p:sp>
         <p:nvSpPr>
-          <p:cNvPr id="16" name="Text 8"/>
+          <p:cNvPr id="17" name="Text 8"/>
           <p:cNvSpPr/>
           <p:nvPr/>
         </p:nvSpPr>
@@ -1512,7 +1536,7 @@
       </p:sp>
       <p:sp>
         <p:nvSpPr>
-          <p:cNvPr id="17" name="Text 9"/>
+          <p:cNvPr id="18" name="Text 9"/>
           <p:cNvSpPr/>
           <p:nvPr/>
         </p:nvSpPr>
@@ -1551,7 +1575,7 @@
       </p:sp>
       <p:sp>
         <p:nvSpPr>
-          <p:cNvPr id="18" name="Text 10"/>
+          <p:cNvPr id="19" name="Text 10"/>
           <p:cNvSpPr/>
           <p:nvPr/>
         </p:nvSpPr>
@@ -1613,7 +1637,7 @@
       </p:sp>
       <p:sp>
         <p:nvSpPr>
-          <p:cNvPr id="19" name="Text 11"/>
+          <p:cNvPr id="20" name="Text 11"/>
           <p:cNvSpPr/>
           <p:nvPr/>
         </p:nvSpPr>
@@ -1655,7 +1679,7 @@
       </p:sp>
       <p:sp>
         <p:nvSpPr>
-          <p:cNvPr id="20" name="Text 12"/>
+          <p:cNvPr id="21" name="Text 12"/>
           <p:cNvSpPr/>
           <p:nvPr/>
         </p:nvSpPr>
@@ -1694,7 +1718,7 @@
       </p:sp>
       <p:sp>
         <p:nvSpPr>
-          <p:cNvPr id="21" name="Text 13"/>
+          <p:cNvPr id="22" name="Text 13"/>
           <p:cNvSpPr/>
           <p:nvPr/>
         </p:nvSpPr>
@@ -1733,7 +1757,7 @@
       </p:sp>
       <p:sp>
         <p:nvSpPr>
-          <p:cNvPr id="22" name="Shape 14"/>
+          <p:cNvPr id="23" name="Shape 14"/>
           <p:cNvSpPr/>
           <p:nvPr/>
         </p:nvSpPr>
@@ -1758,7 +1782,7 @@
       </p:sp>
       <p:sp>
         <p:nvSpPr>
-          <p:cNvPr id="23" name="Shape 15"/>
+          <p:cNvPr id="24" name="Shape 15"/>
           <p:cNvSpPr/>
           <p:nvPr/>
         </p:nvSpPr>
@@ -1783,7 +1807,7 @@
       </p:sp>
       <p:sp>
         <p:nvSpPr>
-          <p:cNvPr id="24" name="Shape 16"/>
+          <p:cNvPr id="25" name="Shape 16"/>
           <p:cNvSpPr/>
           <p:nvPr/>
         </p:nvSpPr>
@@ -1808,7 +1832,7 @@
       </p:sp>
       <p:sp>
         <p:nvSpPr>
-          <p:cNvPr id="25" name="Text 17"/>
+          <p:cNvPr id="26" name="Text 17"/>
           <p:cNvSpPr/>
           <p:nvPr/>
         </p:nvSpPr>
@@ -1847,7 +1871,7 @@
       </p:sp>
       <p:sp>
         <p:nvSpPr>
-          <p:cNvPr id="26" name="Text 18"/>
+          <p:cNvPr id="27" name="Text 18"/>
           <p:cNvSpPr/>
           <p:nvPr/>
         </p:nvSpPr>
@@ -1909,7 +1933,7 @@
       </p:sp>
       <p:sp>
         <p:nvSpPr>
-          <p:cNvPr id="27" name="Shape 19"/>
+          <p:cNvPr id="28" name="Shape 19"/>
           <p:cNvSpPr/>
           <p:nvPr/>
         </p:nvSpPr>
@@ -1934,7 +1958,7 @@
       </p:sp>
       <p:sp>
         <p:nvSpPr>
-          <p:cNvPr id="28" name="Text 20"/>
+          <p:cNvPr id="29" name="Text 20"/>
           <p:cNvSpPr/>
           <p:nvPr/>
         </p:nvSpPr>
@@ -1973,7 +1997,7 @@
       </p:sp>
       <p:sp>
         <p:nvSpPr>
-          <p:cNvPr id="29" name="Text 21"/>
+          <p:cNvPr id="30" name="Text 21"/>
           <p:cNvSpPr/>
           <p:nvPr/>
         </p:nvSpPr>
@@ -2035,7 +2059,7 @@
       </p:sp>
       <p:sp>
         <p:nvSpPr>
-          <p:cNvPr id="30" name="Shape 22"/>
+          <p:cNvPr id="31" name="Shape 22"/>
           <p:cNvSpPr/>
           <p:nvPr/>
         </p:nvSpPr>
@@ -2060,7 +2084,7 @@
       </p:sp>
       <p:sp>
         <p:nvSpPr>
-          <p:cNvPr id="31" name="Text 23"/>
+          <p:cNvPr id="32" name="Text 23"/>
           <p:cNvSpPr/>
           <p:nvPr/>
         </p:nvSpPr>
@@ -2099,7 +2123,7 @@
       </p:sp>
       <p:sp>
         <p:nvSpPr>
-          <p:cNvPr id="32" name="Text 24"/>
+          <p:cNvPr id="33" name="Text 24"/>
           <p:cNvSpPr/>
           <p:nvPr/>
         </p:nvSpPr>
@@ -2161,7 +2185,7 @@
       </p:sp>
       <p:sp>
         <p:nvSpPr>
-          <p:cNvPr id="33" name="Shape 25"/>
+          <p:cNvPr id="34" name="Shape 25"/>
           <p:cNvSpPr/>
           <p:nvPr/>
         </p:nvSpPr>
@@ -2186,7 +2210,7 @@
       </p:sp>
       <p:sp>
         <p:nvSpPr>
-          <p:cNvPr id="34" name="Text 26"/>
+          <p:cNvPr id="35" name="Text 26"/>
           <p:cNvSpPr/>
           <p:nvPr/>
         </p:nvSpPr>
@@ -2225,7 +2249,7 @@
       </p:sp>
       <p:sp>
         <p:nvSpPr>
-          <p:cNvPr id="35" name="Text 27"/>
+          <p:cNvPr id="36" name="Text 27"/>
           <p:cNvSpPr/>
           <p:nvPr/>
         </p:nvSpPr>
@@ -2287,7 +2311,7 @@
       </p:sp>
       <p:sp>
         <p:nvSpPr>
-          <p:cNvPr id="36" name="Shape 28"/>
+          <p:cNvPr id="37" name="Shape 28"/>
           <p:cNvSpPr/>
           <p:nvPr/>
         </p:nvSpPr>
@@ -2314,7 +2338,7 @@
       </p:sp>
       <p:sp>
         <p:nvSpPr>
-          <p:cNvPr id="37" name="Text 29"/>
+          <p:cNvPr id="38" name="Text 29"/>
           <p:cNvSpPr/>
           <p:nvPr/>
         </p:nvSpPr>
@@ -2353,7 +2377,7 @@
       </p:sp>
       <p:sp>
         <p:nvSpPr>
-          <p:cNvPr id="38" name="Text 30"/>
+          <p:cNvPr id="39" name="Text 30"/>
           <p:cNvSpPr/>
           <p:nvPr/>
         </p:nvSpPr>
@@ -2395,7 +2419,7 @@
       </p:sp>
       <p:sp>
         <p:nvSpPr>
-          <p:cNvPr id="39" name="Shape 31"/>
+          <p:cNvPr id="40" name="Shape 31"/>
           <p:cNvSpPr/>
           <p:nvPr/>
         </p:nvSpPr>
@@ -2422,7 +2446,7 @@
       </p:sp>
       <p:sp>
         <p:nvSpPr>
-          <p:cNvPr id="40" name="Text 32"/>
+          <p:cNvPr id="41" name="Text 32"/>
           <p:cNvSpPr/>
           <p:nvPr/>
         </p:nvSpPr>
@@ -2461,7 +2485,7 @@
       </p:sp>
       <p:sp>
         <p:nvSpPr>
-          <p:cNvPr id="41" name="Text 33"/>
+          <p:cNvPr id="42" name="Text 33"/>
           <p:cNvSpPr/>
           <p:nvPr/>
         </p:nvSpPr>
@@ -2503,7 +2527,7 @@
       </p:sp>
       <p:sp>
         <p:nvSpPr>
-          <p:cNvPr id="42" name="Shape 34"/>
+          <p:cNvPr id="43" name="Shape 34"/>
           <p:cNvSpPr/>
           <p:nvPr/>
         </p:nvSpPr>
@@ -2530,7 +2554,7 @@
       </p:sp>
       <p:sp>
         <p:nvSpPr>
-          <p:cNvPr id="43" name="Text 35"/>
+          <p:cNvPr id="44" name="Text 35"/>
           <p:cNvSpPr/>
           <p:nvPr/>
         </p:nvSpPr>
@@ -2569,7 +2593,7 @@
       </p:sp>
       <p:sp>
         <p:nvSpPr>
-          <p:cNvPr id="44" name="Text 36"/>
+          <p:cNvPr id="45" name="Text 36"/>
           <p:cNvSpPr/>
           <p:nvPr/>
         </p:nvSpPr>
@@ -2611,7 +2635,7 @@
       </p:sp>
       <p:sp>
         <p:nvSpPr>
-          <p:cNvPr id="45" name="Text 37"/>
+          <p:cNvPr id="46" name="Text 37"/>
           <p:cNvSpPr/>
           <p:nvPr/>
         </p:nvSpPr>
@@ -2650,7 +2674,7 @@
       </p:sp>
       <p:sp>
         <p:nvSpPr>
-          <p:cNvPr id="46" name="Text 38"/>
+          <p:cNvPr id="47" name="Text 38"/>
           <p:cNvSpPr/>
           <p:nvPr/>
         </p:nvSpPr>
@@ -2689,7 +2713,7 @@
       </p:sp>
       <p:sp>
         <p:nvSpPr>
-          <p:cNvPr id="47" name="Shape 39"/>
+          <p:cNvPr id="48" name="Shape 39"/>
           <p:cNvSpPr/>
           <p:nvPr/>
         </p:nvSpPr>
@@ -2714,7 +2738,7 @@
       </p:sp>
       <p:sp>
         <p:nvSpPr>
-          <p:cNvPr id="48" name="Text 40"/>
+          <p:cNvPr id="49" name="Text 40"/>
           <p:cNvSpPr/>
           <p:nvPr/>
         </p:nvSpPr>
@@ -2753,7 +2777,7 @@
       </p:sp>
       <p:sp>
         <p:nvSpPr>
-          <p:cNvPr id="49" name="Text 41"/>
+          <p:cNvPr id="50" name="Text 41"/>
           <p:cNvSpPr/>
           <p:nvPr/>
         </p:nvSpPr>
@@ -2795,7 +2819,7 @@
       </p:sp>
       <p:sp>
         <p:nvSpPr>
-          <p:cNvPr id="50" name="Shape 42"/>
+          <p:cNvPr id="51" name="Shape 42"/>
           <p:cNvSpPr/>
           <p:nvPr/>
         </p:nvSpPr>
@@ -2820,7 +2844,7 @@
       </p:sp>
       <p:sp>
         <p:nvSpPr>
-          <p:cNvPr id="51" name="Text 43"/>
+          <p:cNvPr id="52" name="Text 43"/>
           <p:cNvSpPr/>
           <p:nvPr/>
         </p:nvSpPr>
@@ -2859,7 +2883,7 @@
       </p:sp>
       <p:sp>
         <p:nvSpPr>
-          <p:cNvPr id="52" name="Text 44"/>
+          <p:cNvPr id="53" name="Text 44"/>
           <p:cNvSpPr/>
           <p:nvPr/>
         </p:nvSpPr>
@@ -2901,7 +2925,7 @@
       </p:sp>
       <p:sp>
         <p:nvSpPr>
-          <p:cNvPr id="53" name="Shape 45"/>
+          <p:cNvPr id="54" name="Shape 45"/>
           <p:cNvSpPr/>
           <p:nvPr/>
         </p:nvSpPr>
@@ -2926,7 +2950,7 @@
       </p:sp>
       <p:sp>
         <p:nvSpPr>
-          <p:cNvPr id="54" name="Text 46"/>
+          <p:cNvPr id="55" name="Text 46"/>
           <p:cNvSpPr/>
           <p:nvPr/>
         </p:nvSpPr>
@@ -2965,7 +2989,7 @@
       </p:sp>
       <p:sp>
         <p:nvSpPr>
-          <p:cNvPr id="55" name="Text 47"/>
+          <p:cNvPr id="56" name="Text 47"/>
           <p:cNvSpPr/>
           <p:nvPr/>
         </p:nvSpPr>
@@ -3007,7 +3031,7 @@
       </p:sp>
       <p:sp>
         <p:nvSpPr>
-          <p:cNvPr id="56" name="Shape 48"/>
+          <p:cNvPr id="57" name="Shape 48"/>
           <p:cNvSpPr/>
           <p:nvPr/>
         </p:nvSpPr>
@@ -3032,7 +3056,7 @@
       </p:sp>
       <p:sp>
         <p:nvSpPr>
-          <p:cNvPr id="57" name="Text 49"/>
+          <p:cNvPr id="58" name="Text 49"/>
           <p:cNvSpPr/>
           <p:nvPr/>
         </p:nvSpPr>
@@ -3071,7 +3095,7 @@
       </p:sp>
       <p:sp>
         <p:nvSpPr>
-          <p:cNvPr id="58" name="Text 50"/>
+          <p:cNvPr id="59" name="Text 50"/>
           <p:cNvSpPr/>
           <p:nvPr/>
         </p:nvSpPr>
@@ -3113,7 +3137,7 @@
       </p:sp>
       <p:sp>
         <p:nvSpPr>
-          <p:cNvPr id="59" name="Shape 51"/>
+          <p:cNvPr id="60" name="Shape 51"/>
           <p:cNvSpPr/>
           <p:nvPr/>
         </p:nvSpPr>
@@ -3138,7 +3162,7 @@
       </p:sp>
       <p:sp>
         <p:nvSpPr>
-          <p:cNvPr id="60" name="Text 52"/>
+          <p:cNvPr id="61" name="Text 52"/>
           <p:cNvSpPr/>
           <p:nvPr/>
         </p:nvSpPr>
@@ -3177,7 +3201,7 @@
       </p:sp>
       <p:sp>
         <p:nvSpPr>
-          <p:cNvPr id="61" name="Text 53"/>
+          <p:cNvPr id="62" name="Text 53"/>
           <p:cNvSpPr/>
           <p:nvPr/>
         </p:nvSpPr>
@@ -3219,7 +3243,7 @@
       </p:sp>
       <p:sp>
         <p:nvSpPr>
-          <p:cNvPr id="62" name="Shape 54"/>
+          <p:cNvPr id="63" name="Shape 54"/>
           <p:cNvSpPr/>
           <p:nvPr/>
         </p:nvSpPr>
@@ -3244,7 +3268,7 @@
       </p:sp>
       <p:sp>
         <p:nvSpPr>
-          <p:cNvPr id="63" name="Text 55"/>
+          <p:cNvPr id="64" name="Text 55"/>
           <p:cNvSpPr/>
           <p:nvPr/>
         </p:nvSpPr>
@@ -3283,7 +3307,7 @@
       </p:sp>
       <p:sp>
         <p:nvSpPr>
-          <p:cNvPr id="64" name="Text 56"/>
+          <p:cNvPr id="65" name="Text 56"/>
           <p:cNvSpPr/>
           <p:nvPr/>
         </p:nvSpPr>
@@ -3345,7 +3369,7 @@
       </p:sp>
       <p:sp>
         <p:nvSpPr>
-          <p:cNvPr id="65" name="Shape 57"/>
+          <p:cNvPr id="66" name="Shape 57"/>
           <p:cNvSpPr/>
           <p:nvPr/>
         </p:nvSpPr>
@@ -3370,7 +3394,7 @@
       </p:sp>
       <p:sp>
         <p:nvSpPr>
-          <p:cNvPr id="66" name="Text 58"/>
+          <p:cNvPr id="67" name="Text 58"/>
           <p:cNvSpPr/>
           <p:nvPr/>
         </p:nvSpPr>
@@ -3409,7 +3433,7 @@
       </p:sp>
       <p:sp>
         <p:nvSpPr>
-          <p:cNvPr id="67" name="Text 59"/>
+          <p:cNvPr id="68" name="Text 59"/>
           <p:cNvSpPr/>
           <p:nvPr/>
         </p:nvSpPr>
@@ -3471,7 +3495,7 @@
       </p:sp>
       <p:sp>
         <p:nvSpPr>
-          <p:cNvPr id="68" name="Shape 60"/>
+          <p:cNvPr id="69" name="Shape 60"/>
           <p:cNvSpPr/>
           <p:nvPr/>
         </p:nvSpPr>
@@ -3496,14 +3520,14 @@
       </p:sp>
       <p:pic>
         <p:nvPicPr>
-          <p:cNvPr id="69" name="Image 6" descr="assets/band_contact.jpg">    </p:cNvPr>
+          <p:cNvPr id="70" name="Image 7" descr="assets/band_contact.jpg">    </p:cNvPr>
           <p:cNvPicPr>
             <a:picLocks noChangeAspect="1"/>
           </p:cNvPicPr>
           <p:nvPr/>
         </p:nvPicPr>
         <p:blipFill>
-          <a:blip r:embed="rId7"/>
+          <a:blip r:embed="rId8"/>
           <a:srcRect l="0" r="0" t="0" b="0"/>
           <a:stretch/>
         </p:blipFill>
@@ -3519,7 +3543,7 @@
       </p:pic>
       <p:sp>
         <p:nvSpPr>
-          <p:cNvPr id="70" name="Text 61"/>
+          <p:cNvPr id="71" name="Text 61"/>
           <p:cNvSpPr/>
           <p:nvPr/>
         </p:nvSpPr>
@@ -3558,7 +3582,7 @@
       </p:sp>
       <p:sp>
         <p:nvSpPr>
-          <p:cNvPr id="71" name="Text 62"/>
+          <p:cNvPr id="72" name="Text 62"/>
           <p:cNvSpPr/>
           <p:nvPr/>
         </p:nvSpPr>
@@ -3660,7 +3684,7 @@
       </p:sp>
       <p:sp>
         <p:nvSpPr>
-          <p:cNvPr id="72" name="Text 63"/>
+          <p:cNvPr id="73" name="Text 63"/>
           <p:cNvSpPr/>
           <p:nvPr/>
         </p:nvSpPr>
@@ -3699,7 +3723,7 @@
       </p:sp>
       <p:sp>
         <p:nvSpPr>
-          <p:cNvPr id="73" name="Shape 64"/>
+          <p:cNvPr id="74" name="Shape 64"/>
           <p:cNvSpPr/>
           <p:nvPr/>
         </p:nvSpPr>
@@ -3728,7 +3752,7 @@
       </p:sp>
       <p:sp>
         <p:nvSpPr>
-          <p:cNvPr id="74" name="Text 65"/>
+          <p:cNvPr id="75" name="Text 65"/>
           <p:cNvSpPr/>
           <p:nvPr/>
         </p:nvSpPr>
@@ -3790,7 +3814,7 @@
       </p:sp>
       <p:sp>
         <p:nvSpPr>
-          <p:cNvPr id="75" name="Text 66"/>
+          <p:cNvPr id="76" name="Text 66"/>
           <p:cNvSpPr/>
           <p:nvPr/>
         </p:nvSpPr>
@@ -3829,7 +3853,7 @@
       </p:sp>
       <p:sp>
         <p:nvSpPr>
-          <p:cNvPr id="76" name="Shape 67"/>
+          <p:cNvPr id="77" name="Shape 67"/>
           <p:cNvSpPr/>
           <p:nvPr/>
         </p:nvSpPr>
@@ -4657,7 +4681,7 @@
       </p:sp>
       <p:pic>
         <p:nvPicPr>
-          <p:cNvPr id="23" name="Image 1" descr="assets/wash_pale.jpg">    </p:cNvPr>
+          <p:cNvPr id="23" name="Image 1" descr="assets/panel_dark.jpg">    </p:cNvPr>
           <p:cNvPicPr>
             <a:picLocks noChangeAspect="1"/>
           </p:cNvPicPr>
@@ -4671,41 +4695,65 @@
         <p:spPr>
           <a:xfrm>
             <a:off x="566928" y="3986784"/>
-            <a:ext cx="6426129" cy="1207008"/>
+            <a:ext cx="6426129" cy="1298448"/>
           </a:xfrm>
           <a:prstGeom prst="rect">
             <a:avLst/>
           </a:prstGeom>
         </p:spPr>
       </p:pic>
-      <p:sp>
-        <p:nvSpPr>
-          <p:cNvPr id="24" name="Text 20"/>
-          <p:cNvSpPr/>
-          <p:nvPr/>
-        </p:nvSpPr>
-        <p:spPr>
-          <a:xfrm>
-            <a:off x="822960" y="4169664"/>
-            <a:ext cx="5914065" cy="256032"/>
-          </a:xfrm>
-          <a:prstGeom prst="rect">
-            <a:avLst/>
-          </a:prstGeom>
-          <a:noFill/>
-          <a:ln/>
-        </p:spPr>
-        <p:txBody>
-          <a:bodyPr wrap="square" lIns="0" tIns="0" rIns="0" bIns="0" rtlCol="0" anchor="ctr"/>
-          <a:lstStyle/>
-          <a:p>
-            <a:pPr indent="0" marL="0">
-              <a:buNone/>
-            </a:pPr>
-            <a:r>
-              <a:rPr lang="en-US" sz="1150" b="1" dirty="0">
-                <a:solidFill>
-                  <a:srgbClr val="0B3041"/>
+      <p:pic>
+        <p:nvPicPr>
+          <p:cNvPr id="24" name="Image 2" descr="assets/scrim_panel.png">    </p:cNvPr>
+          <p:cNvPicPr>
+            <a:picLocks noChangeAspect="1"/>
+          </p:cNvPicPr>
+          <p:nvPr/>
+        </p:nvPicPr>
+        <p:blipFill>
+          <a:blip r:embed="rId3"/>
+          <a:stretch>
+            <a:fillRect/>
+          </a:stretch>
+        </p:blipFill>
+        <p:spPr>
+          <a:xfrm>
+            <a:off x="566928" y="3986784"/>
+            <a:ext cx="6426129" cy="1298448"/>
+          </a:xfrm>
+          <a:prstGeom prst="rect">
+            <a:avLst/>
+          </a:prstGeom>
+        </p:spPr>
+      </p:pic>
+      <p:sp>
+        <p:nvSpPr>
+          <p:cNvPr id="25" name="Text 20"/>
+          <p:cNvSpPr/>
+          <p:nvPr/>
+        </p:nvSpPr>
+        <p:spPr>
+          <a:xfrm>
+            <a:off x="877824" y="4187952"/>
+            <a:ext cx="5804337" cy="274320"/>
+          </a:xfrm>
+          <a:prstGeom prst="rect">
+            <a:avLst/>
+          </a:prstGeom>
+          <a:noFill/>
+          <a:ln/>
+        </p:spPr>
+        <p:txBody>
+          <a:bodyPr wrap="square" lIns="0" tIns="0" rIns="0" bIns="0" rtlCol="0" anchor="ctr"/>
+          <a:lstStyle/>
+          <a:p>
+            <a:pPr indent="0" marL="0">
+              <a:buNone/>
+            </a:pPr>
+            <a:r>
+              <a:rPr lang="en-US" sz="1200" b="1" dirty="0">
+                <a:solidFill>
+                  <a:srgbClr val="FFFFFF"/>
                 </a:solidFill>
                 <a:latin typeface="游ゴシック Medium" pitchFamily="34" charset="0"/>
                 <a:ea typeface="游ゴシック Medium" pitchFamily="34" charset="-122"/>
@@ -4713,20 +4761,20 @@
               </a:rPr>
               <a:t>大切なのは、M&amp;Aをするかどうかを急いで決めることではありません。</a:t>
             </a:r>
-            <a:endParaRPr lang="en-US" sz="1150" dirty="0"/>
-          </a:p>
-        </p:txBody>
-      </p:sp>
-      <p:sp>
-        <p:nvSpPr>
-          <p:cNvPr id="25" name="Text 21"/>
-          <p:cNvSpPr/>
-          <p:nvPr/>
-        </p:nvSpPr>
-        <p:spPr>
-          <a:xfrm>
-            <a:off x="822960" y="4498848"/>
-            <a:ext cx="5914065" cy="694944"/>
+            <a:endParaRPr lang="en-US" sz="1200" dirty="0"/>
+          </a:p>
+        </p:txBody>
+      </p:sp>
+      <p:sp>
+        <p:nvSpPr>
+          <p:cNvPr id="26" name="Text 21"/>
+          <p:cNvSpPr/>
+          <p:nvPr/>
+        </p:nvSpPr>
+        <p:spPr>
+          <a:xfrm>
+            <a:off x="877824" y="4535424"/>
+            <a:ext cx="5804337" cy="694944"/>
           </a:xfrm>
           <a:prstGeom prst="rect">
             <a:avLst/>
@@ -4747,7 +4795,7 @@
             <a:r>
               <a:rPr lang="en-US" sz="850" dirty="0">
                 <a:solidFill>
-                  <a:srgbClr val="5A6670"/>
+                  <a:srgbClr val="B9CDD6"/>
                 </a:solidFill>
                 <a:latin typeface="游ゴシック" pitchFamily="34" charset="0"/>
                 <a:ea typeface="游ゴシック" pitchFamily="34" charset="-122"/>
@@ -4761,13 +4809,13 @@
       </p:sp>
       <p:sp>
         <p:nvSpPr>
-          <p:cNvPr id="26" name="Text 22"/>
-          <p:cNvSpPr/>
-          <p:nvPr/>
-        </p:nvSpPr>
-        <p:spPr>
-          <a:xfrm>
-            <a:off x="566928" y="5413248"/>
+          <p:cNvPr id="27" name="Text 22"/>
+          <p:cNvSpPr/>
+          <p:nvPr/>
+        </p:nvSpPr>
+        <p:spPr>
+          <a:xfrm>
+            <a:off x="566928" y="5486400"/>
             <a:ext cx="3855677" cy="237744"/>
           </a:xfrm>
           <a:prstGeom prst="rect">
@@ -4800,13 +4848,13 @@
       </p:sp>
       <p:sp>
         <p:nvSpPr>
-          <p:cNvPr id="27" name="Text 23"/>
-          <p:cNvSpPr/>
-          <p:nvPr/>
-        </p:nvSpPr>
-        <p:spPr>
-          <a:xfrm>
-            <a:off x="4422605" y="5454396"/>
+          <p:cNvPr id="28" name="Text 23"/>
+          <p:cNvSpPr/>
+          <p:nvPr/>
+        </p:nvSpPr>
+        <p:spPr>
+          <a:xfrm>
+            <a:off x="4422605" y="5527548"/>
             <a:ext cx="2570452" cy="201168"/>
           </a:xfrm>
           <a:prstGeom prst="rect">
@@ -4839,13 +4887,13 @@
       </p:sp>
       <p:sp>
         <p:nvSpPr>
-          <p:cNvPr id="28" name="Shape 24"/>
-          <p:cNvSpPr/>
-          <p:nvPr/>
-        </p:nvSpPr>
-        <p:spPr>
-          <a:xfrm>
-            <a:off x="566928" y="5687568"/>
+          <p:cNvPr id="29" name="Shape 24"/>
+          <p:cNvSpPr/>
+          <p:nvPr/>
+        </p:nvSpPr>
+        <p:spPr>
+          <a:xfrm>
+            <a:off x="566928" y="5760720"/>
             <a:ext cx="6426129" cy="7315"/>
           </a:xfrm>
           <a:prstGeom prst="rect">
@@ -4864,13 +4912,13 @@
       </p:sp>
       <p:sp>
         <p:nvSpPr>
-          <p:cNvPr id="29" name="Shape 25"/>
-          <p:cNvSpPr/>
-          <p:nvPr/>
-        </p:nvSpPr>
-        <p:spPr>
-          <a:xfrm>
-            <a:off x="566928" y="5870448"/>
+          <p:cNvPr id="30" name="Shape 25"/>
+          <p:cNvSpPr/>
+          <p:nvPr/>
+        </p:nvSpPr>
+        <p:spPr>
+          <a:xfrm>
+            <a:off x="566928" y="5943600"/>
             <a:ext cx="3121624" cy="1243584"/>
           </a:xfrm>
           <a:prstGeom prst="roundRect">
@@ -4898,13 +4946,13 @@
       </p:sp>
       <p:sp>
         <p:nvSpPr>
-          <p:cNvPr id="30" name="Text 26"/>
-          <p:cNvSpPr/>
-          <p:nvPr/>
-        </p:nvSpPr>
-        <p:spPr>
-          <a:xfrm>
-            <a:off x="786384" y="6007608"/>
+          <p:cNvPr id="31" name="Text 26"/>
+          <p:cNvSpPr/>
+          <p:nvPr/>
+        </p:nvSpPr>
+        <p:spPr>
+          <a:xfrm>
+            <a:off x="786384" y="6080760"/>
             <a:ext cx="914400" cy="329184"/>
           </a:xfrm>
           <a:prstGeom prst="rect">
@@ -4937,13 +4985,13 @@
       </p:sp>
       <p:sp>
         <p:nvSpPr>
-          <p:cNvPr id="31" name="Text 27"/>
-          <p:cNvSpPr/>
-          <p:nvPr/>
-        </p:nvSpPr>
-        <p:spPr>
-          <a:xfrm>
-            <a:off x="786384" y="6373368"/>
+          <p:cNvPr id="32" name="Text 27"/>
+          <p:cNvSpPr/>
+          <p:nvPr/>
+        </p:nvSpPr>
+        <p:spPr>
+          <a:xfrm>
+            <a:off x="786384" y="6446520"/>
             <a:ext cx="2682712" cy="237744"/>
           </a:xfrm>
           <a:prstGeom prst="rect">
@@ -4976,13 +5024,13 @@
       </p:sp>
       <p:sp>
         <p:nvSpPr>
-          <p:cNvPr id="32" name="Text 28"/>
-          <p:cNvSpPr/>
-          <p:nvPr/>
-        </p:nvSpPr>
-        <p:spPr>
-          <a:xfrm>
-            <a:off x="786384" y="6638544"/>
+          <p:cNvPr id="33" name="Text 28"/>
+          <p:cNvSpPr/>
+          <p:nvPr/>
+        </p:nvSpPr>
+        <p:spPr>
+          <a:xfrm>
+            <a:off x="786384" y="6711696"/>
             <a:ext cx="2682712" cy="457200"/>
           </a:xfrm>
           <a:prstGeom prst="rect">
@@ -5018,13 +5066,13 @@
       </p:sp>
       <p:sp>
         <p:nvSpPr>
-          <p:cNvPr id="33" name="Shape 29"/>
-          <p:cNvSpPr/>
-          <p:nvPr/>
-        </p:nvSpPr>
-        <p:spPr>
-          <a:xfrm>
-            <a:off x="3871432" y="5870448"/>
+          <p:cNvPr id="34" name="Shape 29"/>
+          <p:cNvSpPr/>
+          <p:nvPr/>
+        </p:nvSpPr>
+        <p:spPr>
+          <a:xfrm>
+            <a:off x="3871432" y="5943600"/>
             <a:ext cx="3121624" cy="1243584"/>
           </a:xfrm>
           <a:prstGeom prst="roundRect">
@@ -5052,13 +5100,13 @@
       </p:sp>
       <p:sp>
         <p:nvSpPr>
-          <p:cNvPr id="34" name="Text 30"/>
-          <p:cNvSpPr/>
-          <p:nvPr/>
-        </p:nvSpPr>
-        <p:spPr>
-          <a:xfrm>
-            <a:off x="4090888" y="6007608"/>
+          <p:cNvPr id="35" name="Text 30"/>
+          <p:cNvSpPr/>
+          <p:nvPr/>
+        </p:nvSpPr>
+        <p:spPr>
+          <a:xfrm>
+            <a:off x="4090888" y="6080760"/>
             <a:ext cx="914400" cy="329184"/>
           </a:xfrm>
           <a:prstGeom prst="rect">
@@ -5091,13 +5139,13 @@
       </p:sp>
       <p:sp>
         <p:nvSpPr>
-          <p:cNvPr id="35" name="Text 31"/>
-          <p:cNvSpPr/>
-          <p:nvPr/>
-        </p:nvSpPr>
-        <p:spPr>
-          <a:xfrm>
-            <a:off x="4090888" y="6373368"/>
+          <p:cNvPr id="36" name="Text 31"/>
+          <p:cNvSpPr/>
+          <p:nvPr/>
+        </p:nvSpPr>
+        <p:spPr>
+          <a:xfrm>
+            <a:off x="4090888" y="6446520"/>
             <a:ext cx="2682712" cy="237744"/>
           </a:xfrm>
           <a:prstGeom prst="rect">
@@ -5130,13 +5178,13 @@
       </p:sp>
       <p:sp>
         <p:nvSpPr>
-          <p:cNvPr id="36" name="Text 32"/>
-          <p:cNvSpPr/>
-          <p:nvPr/>
-        </p:nvSpPr>
-        <p:spPr>
-          <a:xfrm>
-            <a:off x="4090888" y="6638544"/>
+          <p:cNvPr id="37" name="Text 32"/>
+          <p:cNvSpPr/>
+          <p:nvPr/>
+        </p:nvSpPr>
+        <p:spPr>
+          <a:xfrm>
+            <a:off x="4090888" y="6711696"/>
             <a:ext cx="2682712" cy="457200"/>
           </a:xfrm>
           <a:prstGeom prst="rect">
@@ -5172,13 +5220,13 @@
       </p:sp>
       <p:sp>
         <p:nvSpPr>
-          <p:cNvPr id="37" name="Shape 33"/>
-          <p:cNvSpPr/>
-          <p:nvPr/>
-        </p:nvSpPr>
-        <p:spPr>
-          <a:xfrm>
-            <a:off x="566928" y="7260336"/>
+          <p:cNvPr id="38" name="Shape 33"/>
+          <p:cNvSpPr/>
+          <p:nvPr/>
+        </p:nvSpPr>
+        <p:spPr>
+          <a:xfrm>
+            <a:off x="566928" y="7333488"/>
             <a:ext cx="3121624" cy="1243584"/>
           </a:xfrm>
           <a:prstGeom prst="roundRect">
@@ -5206,13 +5254,13 @@
       </p:sp>
       <p:sp>
         <p:nvSpPr>
-          <p:cNvPr id="38" name="Text 34"/>
-          <p:cNvSpPr/>
-          <p:nvPr/>
-        </p:nvSpPr>
-        <p:spPr>
-          <a:xfrm>
-            <a:off x="786384" y="7397496"/>
+          <p:cNvPr id="39" name="Text 34"/>
+          <p:cNvSpPr/>
+          <p:nvPr/>
+        </p:nvSpPr>
+        <p:spPr>
+          <a:xfrm>
+            <a:off x="786384" y="7470648"/>
             <a:ext cx="914400" cy="329184"/>
           </a:xfrm>
           <a:prstGeom prst="rect">
@@ -5245,13 +5293,13 @@
       </p:sp>
       <p:sp>
         <p:nvSpPr>
-          <p:cNvPr id="39" name="Text 35"/>
-          <p:cNvSpPr/>
-          <p:nvPr/>
-        </p:nvSpPr>
-        <p:spPr>
-          <a:xfrm>
-            <a:off x="786384" y="7763256"/>
+          <p:cNvPr id="40" name="Text 35"/>
+          <p:cNvSpPr/>
+          <p:nvPr/>
+        </p:nvSpPr>
+        <p:spPr>
+          <a:xfrm>
+            <a:off x="786384" y="7836408"/>
             <a:ext cx="2682712" cy="237744"/>
           </a:xfrm>
           <a:prstGeom prst="rect">
@@ -5284,13 +5332,13 @@
       </p:sp>
       <p:sp>
         <p:nvSpPr>
-          <p:cNvPr id="40" name="Text 36"/>
-          <p:cNvSpPr/>
-          <p:nvPr/>
-        </p:nvSpPr>
-        <p:spPr>
-          <a:xfrm>
-            <a:off x="786384" y="8028432"/>
+          <p:cNvPr id="41" name="Text 36"/>
+          <p:cNvSpPr/>
+          <p:nvPr/>
+        </p:nvSpPr>
+        <p:spPr>
+          <a:xfrm>
+            <a:off x="786384" y="8101584"/>
             <a:ext cx="2682712" cy="457200"/>
           </a:xfrm>
           <a:prstGeom prst="rect">
@@ -5326,13 +5374,13 @@
       </p:sp>
       <p:sp>
         <p:nvSpPr>
-          <p:cNvPr id="41" name="Shape 37"/>
-          <p:cNvSpPr/>
-          <p:nvPr/>
-        </p:nvSpPr>
-        <p:spPr>
-          <a:xfrm>
-            <a:off x="3871432" y="7260336"/>
+          <p:cNvPr id="42" name="Shape 37"/>
+          <p:cNvSpPr/>
+          <p:nvPr/>
+        </p:nvSpPr>
+        <p:spPr>
+          <a:xfrm>
+            <a:off x="3871432" y="7333488"/>
             <a:ext cx="3121624" cy="1243584"/>
           </a:xfrm>
           <a:prstGeom prst="roundRect">
@@ -5360,13 +5408,13 @@
       </p:sp>
       <p:sp>
         <p:nvSpPr>
-          <p:cNvPr id="42" name="Text 38"/>
-          <p:cNvSpPr/>
-          <p:nvPr/>
-        </p:nvSpPr>
-        <p:spPr>
-          <a:xfrm>
-            <a:off x="4090888" y="7397496"/>
+          <p:cNvPr id="43" name="Text 38"/>
+          <p:cNvSpPr/>
+          <p:nvPr/>
+        </p:nvSpPr>
+        <p:spPr>
+          <a:xfrm>
+            <a:off x="4090888" y="7470648"/>
             <a:ext cx="914400" cy="329184"/>
           </a:xfrm>
           <a:prstGeom prst="rect">
@@ -5399,13 +5447,13 @@
       </p:sp>
       <p:sp>
         <p:nvSpPr>
-          <p:cNvPr id="43" name="Text 39"/>
-          <p:cNvSpPr/>
-          <p:nvPr/>
-        </p:nvSpPr>
-        <p:spPr>
-          <a:xfrm>
-            <a:off x="4090888" y="7763256"/>
+          <p:cNvPr id="44" name="Text 39"/>
+          <p:cNvSpPr/>
+          <p:nvPr/>
+        </p:nvSpPr>
+        <p:spPr>
+          <a:xfrm>
+            <a:off x="4090888" y="7836408"/>
             <a:ext cx="2682712" cy="237744"/>
           </a:xfrm>
           <a:prstGeom prst="rect">
@@ -5438,13 +5486,13 @@
       </p:sp>
       <p:sp>
         <p:nvSpPr>
-          <p:cNvPr id="44" name="Text 40"/>
-          <p:cNvSpPr/>
-          <p:nvPr/>
-        </p:nvSpPr>
-        <p:spPr>
-          <a:xfrm>
-            <a:off x="4090888" y="8028432"/>
+          <p:cNvPr id="45" name="Text 40"/>
+          <p:cNvSpPr/>
+          <p:nvPr/>
+        </p:nvSpPr>
+        <p:spPr>
+          <a:xfrm>
+            <a:off x="4090888" y="8101584"/>
             <a:ext cx="2682712" cy="457200"/>
           </a:xfrm>
           <a:prstGeom prst="rect">
@@ -5480,20 +5528,20 @@
       </p:sp>
       <p:pic>
         <p:nvPicPr>
-          <p:cNvPr id="45" name="Image 2" descr="assets/band_stat.jpg">    </p:cNvPr>
+          <p:cNvPr id="46" name="Image 3" descr="assets/band_stat.jpg">    </p:cNvPr>
           <p:cNvPicPr>
             <a:picLocks noChangeAspect="1"/>
           </p:cNvPicPr>
           <p:nvPr/>
         </p:nvPicPr>
         <p:blipFill>
-          <a:blip r:embed="rId3"/>
+          <a:blip r:embed="rId4"/>
           <a:srcRect l="0" r="0" t="0" b="0"/>
           <a:stretch/>
         </p:blipFill>
         <p:spPr>
           <a:xfrm>
-            <a:off x="566928" y="8723376"/>
+            <a:off x="566928" y="8796528"/>
             <a:ext cx="6426129" cy="786384"/>
           </a:xfrm>
           <a:prstGeom prst="rect">
@@ -5503,13 +5551,13 @@
       </p:pic>
       <p:sp>
         <p:nvSpPr>
-          <p:cNvPr id="46" name="Text 41"/>
-          <p:cNvSpPr/>
-          <p:nvPr/>
-        </p:nvSpPr>
-        <p:spPr>
-          <a:xfrm>
-            <a:off x="566928" y="8851392"/>
+          <p:cNvPr id="47" name="Text 41"/>
+          <p:cNvSpPr/>
+          <p:nvPr/>
+        </p:nvSpPr>
+        <p:spPr>
+          <a:xfrm>
+            <a:off x="566928" y="8924544"/>
             <a:ext cx="2142043" cy="292608"/>
           </a:xfrm>
           <a:prstGeom prst="rect">
@@ -5556,13 +5604,13 @@
       </p:sp>
       <p:sp>
         <p:nvSpPr>
-          <p:cNvPr id="47" name="Text 42"/>
-          <p:cNvSpPr/>
-          <p:nvPr/>
-        </p:nvSpPr>
-        <p:spPr>
-          <a:xfrm>
-            <a:off x="603504" y="9180576"/>
+          <p:cNvPr id="48" name="Text 42"/>
+          <p:cNvSpPr/>
+          <p:nvPr/>
+        </p:nvSpPr>
+        <p:spPr>
+          <a:xfrm>
+            <a:off x="603504" y="9253728"/>
             <a:ext cx="2068891" cy="201168"/>
           </a:xfrm>
           <a:prstGeom prst="rect">
@@ -5595,13 +5643,13 @@
       </p:sp>
       <p:sp>
         <p:nvSpPr>
-          <p:cNvPr id="48" name="Shape 43"/>
-          <p:cNvSpPr/>
-          <p:nvPr/>
-        </p:nvSpPr>
-        <p:spPr>
-          <a:xfrm>
-            <a:off x="2708971" y="8906256"/>
+          <p:cNvPr id="49" name="Shape 43"/>
+          <p:cNvSpPr/>
+          <p:nvPr/>
+        </p:nvSpPr>
+        <p:spPr>
+          <a:xfrm>
+            <a:off x="2708971" y="8979408"/>
             <a:ext cx="7315" cy="420624"/>
           </a:xfrm>
           <a:prstGeom prst="rect">
@@ -5622,13 +5670,13 @@
       </p:sp>
       <p:sp>
         <p:nvSpPr>
-          <p:cNvPr id="49" name="Text 44"/>
-          <p:cNvSpPr/>
-          <p:nvPr/>
-        </p:nvSpPr>
-        <p:spPr>
-          <a:xfrm>
-            <a:off x="2708971" y="8851392"/>
+          <p:cNvPr id="50" name="Text 44"/>
+          <p:cNvSpPr/>
+          <p:nvPr/>
+        </p:nvSpPr>
+        <p:spPr>
+          <a:xfrm>
+            <a:off x="2708971" y="8924544"/>
             <a:ext cx="2142043" cy="292608"/>
           </a:xfrm>
           <a:prstGeom prst="rect">
@@ -5675,13 +5723,13 @@
       </p:sp>
       <p:sp>
         <p:nvSpPr>
-          <p:cNvPr id="50" name="Text 45"/>
-          <p:cNvSpPr/>
-          <p:nvPr/>
-        </p:nvSpPr>
-        <p:spPr>
-          <a:xfrm>
-            <a:off x="2745547" y="9180576"/>
+          <p:cNvPr id="51" name="Text 45"/>
+          <p:cNvSpPr/>
+          <p:nvPr/>
+        </p:nvSpPr>
+        <p:spPr>
+          <a:xfrm>
+            <a:off x="2745547" y="9253728"/>
             <a:ext cx="2068891" cy="201168"/>
           </a:xfrm>
           <a:prstGeom prst="rect">
@@ -5714,13 +5762,13 @@
       </p:sp>
       <p:sp>
         <p:nvSpPr>
-          <p:cNvPr id="51" name="Shape 46"/>
-          <p:cNvSpPr/>
-          <p:nvPr/>
-        </p:nvSpPr>
-        <p:spPr>
-          <a:xfrm>
-            <a:off x="4851014" y="8906256"/>
+          <p:cNvPr id="52" name="Shape 46"/>
+          <p:cNvSpPr/>
+          <p:nvPr/>
+        </p:nvSpPr>
+        <p:spPr>
+          <a:xfrm>
+            <a:off x="4851014" y="8979408"/>
             <a:ext cx="7315" cy="420624"/>
           </a:xfrm>
           <a:prstGeom prst="rect">
@@ -5741,13 +5789,13 @@
       </p:sp>
       <p:sp>
         <p:nvSpPr>
-          <p:cNvPr id="52" name="Text 47"/>
-          <p:cNvSpPr/>
-          <p:nvPr/>
-        </p:nvSpPr>
-        <p:spPr>
-          <a:xfrm>
-            <a:off x="4851014" y="8851392"/>
+          <p:cNvPr id="53" name="Text 47"/>
+          <p:cNvSpPr/>
+          <p:nvPr/>
+        </p:nvSpPr>
+        <p:spPr>
+          <a:xfrm>
+            <a:off x="4851014" y="8924544"/>
             <a:ext cx="2142043" cy="292608"/>
           </a:xfrm>
           <a:prstGeom prst="rect">
@@ -5794,13 +5842,13 @@
       </p:sp>
       <p:sp>
         <p:nvSpPr>
-          <p:cNvPr id="53" name="Text 48"/>
-          <p:cNvSpPr/>
-          <p:nvPr/>
-        </p:nvSpPr>
-        <p:spPr>
-          <a:xfrm>
-            <a:off x="4887590" y="9180576"/>
+          <p:cNvPr id="54" name="Text 48"/>
+          <p:cNvSpPr/>
+          <p:nvPr/>
+        </p:nvSpPr>
+        <p:spPr>
+          <a:xfrm>
+            <a:off x="4887590" y="9253728"/>
             <a:ext cx="2068891" cy="201168"/>
           </a:xfrm>
           <a:prstGeom prst="rect">
@@ -5833,13 +5881,13 @@
       </p:sp>
       <p:sp>
         <p:nvSpPr>
-          <p:cNvPr id="54" name="Text 49"/>
-          <p:cNvSpPr/>
-          <p:nvPr/>
-        </p:nvSpPr>
-        <p:spPr>
-          <a:xfrm>
-            <a:off x="566928" y="9637776"/>
+          <p:cNvPr id="55" name="Text 49"/>
+          <p:cNvSpPr/>
+          <p:nvPr/>
+        </p:nvSpPr>
+        <p:spPr>
+          <a:xfrm>
+            <a:off x="566928" y="9710928"/>
             <a:ext cx="6426129" cy="219456"/>
           </a:xfrm>
           <a:prstGeom prst="rect">
@@ -5886,13 +5934,13 @@
       </p:sp>
       <p:sp>
         <p:nvSpPr>
-          <p:cNvPr id="55" name="Text 50"/>
-          <p:cNvSpPr/>
-          <p:nvPr/>
-        </p:nvSpPr>
-        <p:spPr>
-          <a:xfrm>
-            <a:off x="566928" y="9866376"/>
+          <p:cNvPr id="56" name="Text 50"/>
+          <p:cNvSpPr/>
+          <p:nvPr/>
+        </p:nvSpPr>
+        <p:spPr>
+          <a:xfrm>
+            <a:off x="566928" y="9939528"/>
             <a:ext cx="6426129" cy="219456"/>
           </a:xfrm>
           <a:prstGeom prst="rect">
@@ -5939,13 +5987,13 @@
       </p:sp>
       <p:sp>
         <p:nvSpPr>
-          <p:cNvPr id="56" name="Text 51"/>
-          <p:cNvSpPr/>
-          <p:nvPr/>
-        </p:nvSpPr>
-        <p:spPr>
-          <a:xfrm>
-            <a:off x="566928" y="10149840"/>
+          <p:cNvPr id="57" name="Text 51"/>
+          <p:cNvSpPr/>
+          <p:nvPr/>
+        </p:nvSpPr>
+        <p:spPr>
+          <a:xfrm>
+            <a:off x="566928" y="10222992"/>
             <a:ext cx="6426129" cy="182880"/>
           </a:xfrm>
           <a:prstGeom prst="rect">
@@ -5978,14 +6026,14 @@
       </p:sp>
       <p:pic>
         <p:nvPicPr>
-          <p:cNvPr id="57" name="Image 3" descr="assets/mark_mint.png">    </p:cNvPr>
+          <p:cNvPr id="58" name="Image 4" descr="assets/mark_mint.png">    </p:cNvPr>
           <p:cNvPicPr>
             <a:picLocks noChangeAspect="1"/>
           </p:cNvPicPr>
           <p:nvPr/>
         </p:nvPicPr>
         <p:blipFill>
-          <a:blip r:embed="rId4"/>
+          <a:blip r:embed="rId5"/>
           <a:stretch>
             <a:fillRect/>
           </a:stretch>
@@ -6002,7 +6050,7 @@
       </p:pic>
       <p:sp>
         <p:nvSpPr>
-          <p:cNvPr id="58" name="Text 52"/>
+          <p:cNvPr id="59" name="Text 52"/>
           <p:cNvSpPr/>
           <p:nvPr/>
         </p:nvSpPr>
@@ -6041,7 +6089,7 @@
       </p:sp>
       <p:sp>
         <p:nvSpPr>
-          <p:cNvPr id="59" name="Text 53"/>
+          <p:cNvPr id="60" name="Text 53"/>
           <p:cNvSpPr/>
           <p:nvPr/>
         </p:nvSpPr>
@@ -6080,7 +6128,7 @@
       </p:sp>
       <p:sp>
         <p:nvSpPr>
-          <p:cNvPr id="60" name="Text 54"/>
+          <p:cNvPr id="61" name="Text 54"/>
           <p:cNvSpPr/>
           <p:nvPr/>
         </p:nvSpPr>
@@ -6140,21 +6188,1203 @@
           </a:p>
         </p:txBody>
       </p:sp>
-      <p:sp>
-        <p:nvSpPr>
-          <p:cNvPr id="61" name="Shape 55"/>
-          <p:cNvSpPr/>
-          <p:nvPr/>
-        </p:nvSpPr>
+      <p:pic>
+        <p:nvPicPr>
+          <p:cNvPr id="62" name="Image 5" descr="assets/band_service.jpg">    </p:cNvPr>
+          <p:cNvPicPr>
+            <a:picLocks noChangeAspect="1"/>
+          </p:cNvPicPr>
+          <p:nvPr/>
+        </p:nvPicPr>
+        <p:blipFill>
+          <a:blip r:embed="rId6"/>
+          <a:srcRect l="0" r="0" t="0" b="0"/>
+          <a:stretch/>
+        </p:blipFill>
         <p:spPr>
           <a:xfrm>
             <a:off x="8126913" y="2103120"/>
-            <a:ext cx="6426129" cy="877824"/>
+            <a:ext cx="6426129" cy="914400"/>
+          </a:xfrm>
+          <a:prstGeom prst="rect">
+            <a:avLst/>
+          </a:prstGeom>
+        </p:spPr>
+      </p:pic>
+      <p:pic>
+        <p:nvPicPr>
+          <p:cNvPr id="63" name="Image 6" descr="assets/scrim_panel.png">    </p:cNvPr>
+          <p:cNvPicPr>
+            <a:picLocks noChangeAspect="1"/>
+          </p:cNvPicPr>
+          <p:nvPr/>
+        </p:nvPicPr>
+        <p:blipFill>
+          <a:blip r:embed="rId7"/>
+          <a:stretch>
+            <a:fillRect/>
+          </a:stretch>
+        </p:blipFill>
+        <p:spPr>
+          <a:xfrm>
+            <a:off x="8126913" y="2103120"/>
+            <a:ext cx="6426129" cy="914400"/>
+          </a:xfrm>
+          <a:prstGeom prst="rect">
+            <a:avLst/>
+          </a:prstGeom>
+        </p:spPr>
+      </p:pic>
+      <p:sp>
+        <p:nvSpPr>
+          <p:cNvPr id="64" name="Text 55"/>
+          <p:cNvSpPr/>
+          <p:nvPr/>
+        </p:nvSpPr>
+        <p:spPr>
+          <a:xfrm>
+            <a:off x="8437809" y="2258568"/>
+            <a:ext cx="5804337" cy="256032"/>
+          </a:xfrm>
+          <a:prstGeom prst="rect">
+            <a:avLst/>
+          </a:prstGeom>
+          <a:noFill/>
+          <a:ln/>
+        </p:spPr>
+        <p:txBody>
+          <a:bodyPr wrap="square" lIns="0" tIns="0" rIns="0" bIns="0" rtlCol="0" anchor="ctr"/>
+          <a:lstStyle/>
+          <a:p>
+            <a:pPr indent="0" marL="0">
+              <a:buNone/>
+            </a:pPr>
+            <a:r>
+              <a:rPr lang="en-US" sz="1200" b="1" dirty="0">
+                <a:solidFill>
+                  <a:srgbClr val="FFFFFF"/>
+                </a:solidFill>
+                <a:latin typeface="游ゴシック Medium" pitchFamily="34" charset="0"/>
+                <a:ea typeface="游ゴシック Medium" pitchFamily="34" charset="-122"/>
+                <a:cs typeface="游ゴシック Medium" pitchFamily="34" charset="-120"/>
+              </a:rPr>
+              <a:t>M&amp;A仲介・アドバイザリー</a:t>
+            </a:r>
+            <a:endParaRPr lang="en-US" sz="1200" dirty="0"/>
+          </a:p>
+        </p:txBody>
+      </p:sp>
+      <p:sp>
+        <p:nvSpPr>
+          <p:cNvPr id="65" name="Text 56"/>
+          <p:cNvSpPr/>
+          <p:nvPr/>
+        </p:nvSpPr>
+        <p:spPr>
+          <a:xfrm>
+            <a:off x="8437809" y="2542032"/>
+            <a:ext cx="5804337" cy="420624"/>
+          </a:xfrm>
+          <a:prstGeom prst="rect">
+            <a:avLst/>
+          </a:prstGeom>
+          <a:noFill/>
+          <a:ln/>
+        </p:spPr>
+        <p:txBody>
+          <a:bodyPr wrap="square" lIns="0" tIns="0" rIns="0" bIns="0" rtlCol="0" anchor="ctr"/>
+          <a:lstStyle/>
+          <a:p>
+            <a:pPr indent="0" marL="0">
+              <a:lnSpc>
+                <a:spcPct val="142000"/>
+              </a:lnSpc>
+              <a:buNone/>
+            </a:pPr>
+            <a:r>
+              <a:rPr lang="en-US" sz="850" dirty="0">
+                <a:solidFill>
+                  <a:srgbClr val="BDD1DA"/>
+                </a:solidFill>
+                <a:latin typeface="游ゴシック" pitchFamily="34" charset="0"/>
+                <a:ea typeface="游ゴシック" pitchFamily="34" charset="-122"/>
+                <a:cs typeface="游ゴシック" pitchFamily="34" charset="-120"/>
+              </a:rPr>
+              <a:t>譲渡（事業承継・成長戦略）と譲受（買収・資本提携）の双方を支援。株式譲渡・事業譲渡に加え、会社分割や二段階譲渡など目的に応じたスキームを設計します。</a:t>
+            </a:r>
+            <a:endParaRPr lang="en-US" sz="850" dirty="0"/>
+          </a:p>
+        </p:txBody>
+      </p:sp>
+      <p:sp>
+        <p:nvSpPr>
+          <p:cNvPr id="66" name="Text 57"/>
+          <p:cNvSpPr/>
+          <p:nvPr/>
+        </p:nvSpPr>
+        <p:spPr>
+          <a:xfrm>
+            <a:off x="8126913" y="3200400"/>
+            <a:ext cx="6426129" cy="219456"/>
+          </a:xfrm>
+          <a:prstGeom prst="rect">
+            <a:avLst/>
+          </a:prstGeom>
+          <a:noFill/>
+          <a:ln/>
+        </p:spPr>
+        <p:txBody>
+          <a:bodyPr wrap="square" lIns="0" tIns="0" rIns="0" bIns="0" rtlCol="0" anchor="ctr"/>
+          <a:lstStyle/>
+          <a:p>
+            <a:pPr indent="0" marL="0">
+              <a:buNone/>
+            </a:pPr>
+            <a:r>
+              <a:rPr lang="en-US" sz="850" dirty="0">
+                <a:solidFill>
+                  <a:srgbClr val="5A6670"/>
+                </a:solidFill>
+                <a:latin typeface="游ゴシック" pitchFamily="34" charset="0"/>
+                <a:ea typeface="游ゴシック" pitchFamily="34" charset="-122"/>
+                <a:cs typeface="游ゴシック" pitchFamily="34" charset="-120"/>
+              </a:rPr>
+              <a:t>M&amp;A以外の経営課題も、提携先ネットワークでワンストップにご相談いただけます。</a:t>
+            </a:r>
+            <a:endParaRPr lang="en-US" sz="850" dirty="0"/>
+          </a:p>
+        </p:txBody>
+      </p:sp>
+      <p:sp>
+        <p:nvSpPr>
+          <p:cNvPr id="67" name="Shape 58"/>
+          <p:cNvSpPr/>
+          <p:nvPr/>
+        </p:nvSpPr>
+        <p:spPr>
+          <a:xfrm>
+            <a:off x="8126913" y="3511296"/>
+            <a:ext cx="2068891" cy="1207008"/>
           </a:xfrm>
           <a:prstGeom prst="roundRect">
             <a:avLst>
-              <a:gd name="adj" fmla="val 5208"/>
+              <a:gd name="adj" fmla="val 3788"/>
             </a:avLst>
+          </a:prstGeom>
+          <a:solidFill>
+            <a:srgbClr val="F7FAFB"/>
+          </a:solidFill>
+          <a:ln w="7620">
+            <a:solidFill>
+              <a:srgbClr val="E2EAEE"/>
+            </a:solidFill>
+            <a:prstDash val="solid"/>
+          </a:ln>
+        </p:spPr>
+      </p:sp>
+      <p:sp>
+        <p:nvSpPr>
+          <p:cNvPr id="68" name="Text 59"/>
+          <p:cNvSpPr/>
+          <p:nvPr/>
+        </p:nvSpPr>
+        <p:spPr>
+          <a:xfrm>
+            <a:off x="8273217" y="3630168"/>
+            <a:ext cx="1776283" cy="219456"/>
+          </a:xfrm>
+          <a:prstGeom prst="rect">
+            <a:avLst/>
+          </a:prstGeom>
+          <a:noFill/>
+          <a:ln/>
+        </p:spPr>
+        <p:txBody>
+          <a:bodyPr wrap="square" lIns="0" tIns="0" rIns="0" bIns="0" rtlCol="0" anchor="ctr"/>
+          <a:lstStyle/>
+          <a:p>
+            <a:pPr indent="0" marL="0">
+              <a:buNone/>
+            </a:pPr>
+            <a:r>
+              <a:rPr lang="en-US" sz="950" b="1" dirty="0">
+                <a:solidFill>
+                  <a:srgbClr val="0B3041"/>
+                </a:solidFill>
+                <a:latin typeface="游ゴシック Medium" pitchFamily="34" charset="0"/>
+                <a:ea typeface="游ゴシック Medium" pitchFamily="34" charset="-122"/>
+                <a:cs typeface="游ゴシック Medium" pitchFamily="34" charset="-120"/>
+              </a:rPr>
+              <a:t>財務・資金繰り支援</a:t>
+            </a:r>
+            <a:endParaRPr lang="en-US" sz="950" dirty="0"/>
+          </a:p>
+        </p:txBody>
+      </p:sp>
+      <p:sp>
+        <p:nvSpPr>
+          <p:cNvPr id="69" name="Shape 60"/>
+          <p:cNvSpPr/>
+          <p:nvPr/>
+        </p:nvSpPr>
+        <p:spPr>
+          <a:xfrm>
+            <a:off x="8273217" y="3886200"/>
+            <a:ext cx="1776283" cy="7315"/>
+          </a:xfrm>
+          <a:prstGeom prst="rect">
+            <a:avLst/>
+          </a:prstGeom>
+          <a:solidFill>
+            <a:srgbClr val="D3E2E7"/>
+          </a:solidFill>
+          <a:ln w="12700">
+            <a:solidFill>
+              <a:srgbClr val="333333"/>
+            </a:solidFill>
+            <a:prstDash val="solid"/>
+          </a:ln>
+        </p:spPr>
+      </p:sp>
+      <p:sp>
+        <p:nvSpPr>
+          <p:cNvPr id="70" name="Text 61"/>
+          <p:cNvSpPr/>
+          <p:nvPr/>
+        </p:nvSpPr>
+        <p:spPr>
+          <a:xfrm>
+            <a:off x="8273217" y="3950208"/>
+            <a:ext cx="1776283" cy="713232"/>
+          </a:xfrm>
+          <a:prstGeom prst="rect">
+            <a:avLst/>
+          </a:prstGeom>
+          <a:noFill/>
+          <a:ln/>
+        </p:spPr>
+        <p:txBody>
+          <a:bodyPr wrap="square" lIns="0" tIns="0" rIns="0" bIns="0" rtlCol="0" anchor="ctr"/>
+          <a:lstStyle/>
+          <a:p>
+            <a:pPr indent="0" marL="0">
+              <a:lnSpc>
+                <a:spcPct val="150000"/>
+              </a:lnSpc>
+              <a:buNone/>
+            </a:pPr>
+            <a:r>
+              <a:rPr lang="en-US" sz="800" dirty="0">
+                <a:solidFill>
+                  <a:srgbClr val="5A6670"/>
+                </a:solidFill>
+                <a:latin typeface="游ゴシック" pitchFamily="34" charset="0"/>
+                <a:ea typeface="游ゴシック" pitchFamily="34" charset="-122"/>
+                <a:cs typeface="游ゴシック" pitchFamily="34" charset="-120"/>
+              </a:rPr>
+              <a:t>資金調達・資金繰り改善</a:t>
+            </a:r>
+            <a:endParaRPr lang="en-US" sz="800" dirty="0"/>
+          </a:p>
+          <a:p>
+            <a:pPr indent="0" marL="0">
+              <a:lnSpc>
+                <a:spcPct val="150000"/>
+              </a:lnSpc>
+              <a:buNone/>
+            </a:pPr>
+            <a:r>
+              <a:rPr lang="en-US" sz="800" dirty="0">
+                <a:solidFill>
+                  <a:srgbClr val="5A6670"/>
+                </a:solidFill>
+                <a:latin typeface="游ゴシック" pitchFamily="34" charset="0"/>
+                <a:ea typeface="游ゴシック" pitchFamily="34" charset="-122"/>
+                <a:cs typeface="游ゴシック" pitchFamily="34" charset="-120"/>
+              </a:rPr>
+              <a:t>財務コンサルティング</a:t>
+            </a:r>
+            <a:endParaRPr lang="en-US" sz="800" dirty="0"/>
+          </a:p>
+          <a:p>
+            <a:pPr indent="0" marL="0">
+              <a:lnSpc>
+                <a:spcPct val="150000"/>
+              </a:lnSpc>
+              <a:buNone/>
+            </a:pPr>
+            <a:r>
+              <a:rPr lang="en-US" sz="800" dirty="0">
+                <a:solidFill>
+                  <a:srgbClr val="5A6670"/>
+                </a:solidFill>
+                <a:latin typeface="游ゴシック" pitchFamily="34" charset="0"/>
+                <a:ea typeface="游ゴシック" pitchFamily="34" charset="-122"/>
+                <a:cs typeface="游ゴシック" pitchFamily="34" charset="-120"/>
+              </a:rPr>
+              <a:t>事業再生・スポンサー探索</a:t>
+            </a:r>
+            <a:endParaRPr lang="en-US" sz="800" dirty="0"/>
+          </a:p>
+        </p:txBody>
+      </p:sp>
+      <p:sp>
+        <p:nvSpPr>
+          <p:cNvPr id="71" name="Shape 62"/>
+          <p:cNvSpPr/>
+          <p:nvPr/>
+        </p:nvSpPr>
+        <p:spPr>
+          <a:xfrm>
+            <a:off x="10305532" y="3511296"/>
+            <a:ext cx="2068891" cy="1207008"/>
+          </a:xfrm>
+          <a:prstGeom prst="roundRect">
+            <a:avLst>
+              <a:gd name="adj" fmla="val 3788"/>
+            </a:avLst>
+          </a:prstGeom>
+          <a:solidFill>
+            <a:srgbClr val="F7FAFB"/>
+          </a:solidFill>
+          <a:ln w="7620">
+            <a:solidFill>
+              <a:srgbClr val="E2EAEE"/>
+            </a:solidFill>
+            <a:prstDash val="solid"/>
+          </a:ln>
+        </p:spPr>
+      </p:sp>
+      <p:sp>
+        <p:nvSpPr>
+          <p:cNvPr id="72" name="Text 63"/>
+          <p:cNvSpPr/>
+          <p:nvPr/>
+        </p:nvSpPr>
+        <p:spPr>
+          <a:xfrm>
+            <a:off x="10451836" y="3630168"/>
+            <a:ext cx="1776283" cy="219456"/>
+          </a:xfrm>
+          <a:prstGeom prst="rect">
+            <a:avLst/>
+          </a:prstGeom>
+          <a:noFill/>
+          <a:ln/>
+        </p:spPr>
+        <p:txBody>
+          <a:bodyPr wrap="square" lIns="0" tIns="0" rIns="0" bIns="0" rtlCol="0" anchor="ctr"/>
+          <a:lstStyle/>
+          <a:p>
+            <a:pPr indent="0" marL="0">
+              <a:buNone/>
+            </a:pPr>
+            <a:r>
+              <a:rPr lang="en-US" sz="950" b="1" dirty="0">
+                <a:solidFill>
+                  <a:srgbClr val="0B3041"/>
+                </a:solidFill>
+                <a:latin typeface="游ゴシック Medium" pitchFamily="34" charset="0"/>
+                <a:ea typeface="游ゴシック Medium" pitchFamily="34" charset="-122"/>
+                <a:cs typeface="游ゴシック Medium" pitchFamily="34" charset="-120"/>
+              </a:rPr>
+              <a:t>成長支援</a:t>
+            </a:r>
+            <a:endParaRPr lang="en-US" sz="950" dirty="0"/>
+          </a:p>
+        </p:txBody>
+      </p:sp>
+      <p:sp>
+        <p:nvSpPr>
+          <p:cNvPr id="73" name="Shape 64"/>
+          <p:cNvSpPr/>
+          <p:nvPr/>
+        </p:nvSpPr>
+        <p:spPr>
+          <a:xfrm>
+            <a:off x="10451836" y="3886200"/>
+            <a:ext cx="1776283" cy="7315"/>
+          </a:xfrm>
+          <a:prstGeom prst="rect">
+            <a:avLst/>
+          </a:prstGeom>
+          <a:solidFill>
+            <a:srgbClr val="D3E2E7"/>
+          </a:solidFill>
+          <a:ln w="12700">
+            <a:solidFill>
+              <a:srgbClr val="333333"/>
+            </a:solidFill>
+            <a:prstDash val="solid"/>
+          </a:ln>
+        </p:spPr>
+      </p:sp>
+      <p:sp>
+        <p:nvSpPr>
+          <p:cNvPr id="74" name="Text 65"/>
+          <p:cNvSpPr/>
+          <p:nvPr/>
+        </p:nvSpPr>
+        <p:spPr>
+          <a:xfrm>
+            <a:off x="10451836" y="3950208"/>
+            <a:ext cx="1776283" cy="713232"/>
+          </a:xfrm>
+          <a:prstGeom prst="rect">
+            <a:avLst/>
+          </a:prstGeom>
+          <a:noFill/>
+          <a:ln/>
+        </p:spPr>
+        <p:txBody>
+          <a:bodyPr wrap="square" lIns="0" tIns="0" rIns="0" bIns="0" rtlCol="0" anchor="ctr"/>
+          <a:lstStyle/>
+          <a:p>
+            <a:pPr indent="0" marL="0">
+              <a:lnSpc>
+                <a:spcPct val="150000"/>
+              </a:lnSpc>
+              <a:buNone/>
+            </a:pPr>
+            <a:r>
+              <a:rPr lang="en-US" sz="800" dirty="0">
+                <a:solidFill>
+                  <a:srgbClr val="5A6670"/>
+                </a:solidFill>
+                <a:latin typeface="游ゴシック" pitchFamily="34" charset="0"/>
+                <a:ea typeface="游ゴシック" pitchFamily="34" charset="-122"/>
+                <a:cs typeface="游ゴシック" pitchFamily="34" charset="-120"/>
+              </a:rPr>
+              <a:t>成長戦略・DX・IT支援</a:t>
+            </a:r>
+            <a:endParaRPr lang="en-US" sz="800" dirty="0"/>
+          </a:p>
+          <a:p>
+            <a:pPr indent="0" marL="0">
+              <a:lnSpc>
+                <a:spcPct val="150000"/>
+              </a:lnSpc>
+              <a:buNone/>
+            </a:pPr>
+            <a:r>
+              <a:rPr lang="en-US" sz="800" dirty="0">
+                <a:solidFill>
+                  <a:srgbClr val="5A6670"/>
+                </a:solidFill>
+                <a:latin typeface="游ゴシック" pitchFamily="34" charset="0"/>
+                <a:ea typeface="游ゴシック" pitchFamily="34" charset="-122"/>
+                <a:cs typeface="游ゴシック" pitchFamily="34" charset="-120"/>
+              </a:rPr>
+              <a:t>人材・組織構築</a:t>
+            </a:r>
+            <a:endParaRPr lang="en-US" sz="800" dirty="0"/>
+          </a:p>
+          <a:p>
+            <a:pPr indent="0" marL="0">
+              <a:lnSpc>
+                <a:spcPct val="150000"/>
+              </a:lnSpc>
+              <a:buNone/>
+            </a:pPr>
+            <a:r>
+              <a:rPr lang="en-US" sz="800" dirty="0">
+                <a:solidFill>
+                  <a:srgbClr val="5A6670"/>
+                </a:solidFill>
+                <a:latin typeface="游ゴシック" pitchFamily="34" charset="0"/>
+                <a:ea typeface="游ゴシック" pitchFamily="34" charset="-122"/>
+                <a:cs typeface="游ゴシック" pitchFamily="34" charset="-120"/>
+              </a:rPr>
+              <a:t>BPO・業務効率化</a:t>
+            </a:r>
+            <a:endParaRPr lang="en-US" sz="800" dirty="0"/>
+          </a:p>
+        </p:txBody>
+      </p:sp>
+      <p:sp>
+        <p:nvSpPr>
+          <p:cNvPr id="75" name="Shape 66"/>
+          <p:cNvSpPr/>
+          <p:nvPr/>
+        </p:nvSpPr>
+        <p:spPr>
+          <a:xfrm>
+            <a:off x="12484151" y="3511296"/>
+            <a:ext cx="2068891" cy="1207008"/>
+          </a:xfrm>
+          <a:prstGeom prst="roundRect">
+            <a:avLst>
+              <a:gd name="adj" fmla="val 3788"/>
+            </a:avLst>
+          </a:prstGeom>
+          <a:solidFill>
+            <a:srgbClr val="F7FAFB"/>
+          </a:solidFill>
+          <a:ln w="7620">
+            <a:solidFill>
+              <a:srgbClr val="E2EAEE"/>
+            </a:solidFill>
+            <a:prstDash val="solid"/>
+          </a:ln>
+        </p:spPr>
+      </p:sp>
+      <p:sp>
+        <p:nvSpPr>
+          <p:cNvPr id="76" name="Text 67"/>
+          <p:cNvSpPr/>
+          <p:nvPr/>
+        </p:nvSpPr>
+        <p:spPr>
+          <a:xfrm>
+            <a:off x="12630455" y="3630168"/>
+            <a:ext cx="1776283" cy="219456"/>
+          </a:xfrm>
+          <a:prstGeom prst="rect">
+            <a:avLst/>
+          </a:prstGeom>
+          <a:noFill/>
+          <a:ln/>
+        </p:spPr>
+        <p:txBody>
+          <a:bodyPr wrap="square" lIns="0" tIns="0" rIns="0" bIns="0" rtlCol="0" anchor="ctr"/>
+          <a:lstStyle/>
+          <a:p>
+            <a:pPr indent="0" marL="0">
+              <a:buNone/>
+            </a:pPr>
+            <a:r>
+              <a:rPr lang="en-US" sz="950" b="1" dirty="0">
+                <a:solidFill>
+                  <a:srgbClr val="0B3041"/>
+                </a:solidFill>
+                <a:latin typeface="游ゴシック Medium" pitchFamily="34" charset="0"/>
+                <a:ea typeface="游ゴシック Medium" pitchFamily="34" charset="-122"/>
+                <a:cs typeface="游ゴシック Medium" pitchFamily="34" charset="-120"/>
+              </a:rPr>
+              <a:t>譲渡後のサポート</a:t>
+            </a:r>
+            <a:endParaRPr lang="en-US" sz="950" dirty="0"/>
+          </a:p>
+        </p:txBody>
+      </p:sp>
+      <p:sp>
+        <p:nvSpPr>
+          <p:cNvPr id="77" name="Shape 68"/>
+          <p:cNvSpPr/>
+          <p:nvPr/>
+        </p:nvSpPr>
+        <p:spPr>
+          <a:xfrm>
+            <a:off x="12630455" y="3886200"/>
+            <a:ext cx="1776283" cy="7315"/>
+          </a:xfrm>
+          <a:prstGeom prst="rect">
+            <a:avLst/>
+          </a:prstGeom>
+          <a:solidFill>
+            <a:srgbClr val="D3E2E7"/>
+          </a:solidFill>
+          <a:ln w="12700">
+            <a:solidFill>
+              <a:srgbClr val="333333"/>
+            </a:solidFill>
+            <a:prstDash val="solid"/>
+          </a:ln>
+        </p:spPr>
+      </p:sp>
+      <p:sp>
+        <p:nvSpPr>
+          <p:cNvPr id="78" name="Text 69"/>
+          <p:cNvSpPr/>
+          <p:nvPr/>
+        </p:nvSpPr>
+        <p:spPr>
+          <a:xfrm>
+            <a:off x="12630455" y="3950208"/>
+            <a:ext cx="1776283" cy="713232"/>
+          </a:xfrm>
+          <a:prstGeom prst="rect">
+            <a:avLst/>
+          </a:prstGeom>
+          <a:noFill/>
+          <a:ln/>
+        </p:spPr>
+        <p:txBody>
+          <a:bodyPr wrap="square" lIns="0" tIns="0" rIns="0" bIns="0" rtlCol="0" anchor="ctr"/>
+          <a:lstStyle/>
+          <a:p>
+            <a:pPr indent="0" marL="0">
+              <a:lnSpc>
+                <a:spcPct val="150000"/>
+              </a:lnSpc>
+              <a:buNone/>
+            </a:pPr>
+            <a:r>
+              <a:rPr lang="en-US" sz="800" dirty="0">
+                <a:solidFill>
+                  <a:srgbClr val="5A6670"/>
+                </a:solidFill>
+                <a:latin typeface="游ゴシック" pitchFamily="34" charset="0"/>
+                <a:ea typeface="游ゴシック" pitchFamily="34" charset="-122"/>
+                <a:cs typeface="游ゴシック" pitchFamily="34" charset="-120"/>
+              </a:rPr>
+              <a:t>資産運用・保険</a:t>
+            </a:r>
+            <a:endParaRPr lang="en-US" sz="800" dirty="0"/>
+          </a:p>
+          <a:p>
+            <a:pPr indent="0" marL="0">
+              <a:lnSpc>
+                <a:spcPct val="150000"/>
+              </a:lnSpc>
+              <a:buNone/>
+            </a:pPr>
+            <a:r>
+              <a:rPr lang="en-US" sz="800" dirty="0">
+                <a:solidFill>
+                  <a:srgbClr val="5A6670"/>
+                </a:solidFill>
+                <a:latin typeface="游ゴシック" pitchFamily="34" charset="0"/>
+                <a:ea typeface="游ゴシック" pitchFamily="34" charset="-122"/>
+                <a:cs typeface="游ゴシック" pitchFamily="34" charset="-120"/>
+              </a:rPr>
+              <a:t>不動産のご紹介</a:t>
+            </a:r>
+            <a:endParaRPr lang="en-US" sz="800" dirty="0"/>
+          </a:p>
+          <a:p>
+            <a:pPr indent="0" marL="0">
+              <a:lnSpc>
+                <a:spcPct val="150000"/>
+              </a:lnSpc>
+              <a:buNone/>
+            </a:pPr>
+            <a:r>
+              <a:rPr lang="en-US" sz="800" dirty="0">
+                <a:solidFill>
+                  <a:srgbClr val="5A6670"/>
+                </a:solidFill>
+                <a:latin typeface="游ゴシック" pitchFamily="34" charset="0"/>
+                <a:ea typeface="游ゴシック" pitchFamily="34" charset="-122"/>
+                <a:cs typeface="游ゴシック" pitchFamily="34" charset="-120"/>
+              </a:rPr>
+              <a:t>税務・専門家との連携</a:t>
+            </a:r>
+            <a:endParaRPr lang="en-US" sz="800" dirty="0"/>
+          </a:p>
+        </p:txBody>
+      </p:sp>
+      <p:sp>
+        <p:nvSpPr>
+          <p:cNvPr id="79" name="Text 70"/>
+          <p:cNvSpPr/>
+          <p:nvPr/>
+        </p:nvSpPr>
+        <p:spPr>
+          <a:xfrm>
+            <a:off x="8126913" y="4992624"/>
+            <a:ext cx="3855677" cy="237744"/>
+          </a:xfrm>
+          <a:prstGeom prst="rect">
+            <a:avLst/>
+          </a:prstGeom>
+          <a:noFill/>
+          <a:ln/>
+        </p:spPr>
+        <p:txBody>
+          <a:bodyPr wrap="square" lIns="0" tIns="0" rIns="0" bIns="0" rtlCol="0" anchor="ctr"/>
+          <a:lstStyle/>
+          <a:p>
+            <a:pPr indent="0" marL="0">
+              <a:buNone/>
+            </a:pPr>
+            <a:r>
+              <a:rPr lang="en-US" sz="1250" b="1" dirty="0">
+                <a:solidFill>
+                  <a:srgbClr val="0B3041"/>
+                </a:solidFill>
+                <a:latin typeface="游ゴシック Medium" pitchFamily="34" charset="0"/>
+                <a:ea typeface="游ゴシック Medium" pitchFamily="34" charset="-122"/>
+                <a:cs typeface="游ゴシック Medium" pitchFamily="34" charset="-120"/>
+              </a:rPr>
+              <a:t>料金体系｜完全成功報酬型</a:t>
+            </a:r>
+            <a:endParaRPr lang="en-US" sz="1250" dirty="0"/>
+          </a:p>
+        </p:txBody>
+      </p:sp>
+      <p:sp>
+        <p:nvSpPr>
+          <p:cNvPr id="80" name="Text 71"/>
+          <p:cNvSpPr/>
+          <p:nvPr/>
+        </p:nvSpPr>
+        <p:spPr>
+          <a:xfrm>
+            <a:off x="11982590" y="5033772"/>
+            <a:ext cx="2570452" cy="201168"/>
+          </a:xfrm>
+          <a:prstGeom prst="rect">
+            <a:avLst/>
+          </a:prstGeom>
+          <a:noFill/>
+          <a:ln/>
+        </p:spPr>
+        <p:txBody>
+          <a:bodyPr wrap="square" lIns="0" tIns="0" rIns="0" bIns="0" rtlCol="0" anchor="ctr"/>
+          <a:lstStyle/>
+          <a:p>
+            <a:pPr algn="r" indent="0" marL="0">
+              <a:buNone/>
+            </a:pPr>
+            <a:r>
+              <a:rPr lang="en-US" sz="750" spc="180" kern="0" dirty="0">
+                <a:solidFill>
+                  <a:srgbClr val="8A959D"/>
+                </a:solidFill>
+                <a:latin typeface="Arial" pitchFamily="34" charset="0"/>
+                <a:ea typeface="游ゴシック" pitchFamily="34" charset="-122"/>
+                <a:cs typeface="Arial" pitchFamily="34" charset="-120"/>
+              </a:rPr>
+              <a:t>FEE</a:t>
+            </a:r>
+            <a:endParaRPr lang="en-US" sz="750" dirty="0"/>
+          </a:p>
+        </p:txBody>
+      </p:sp>
+      <p:sp>
+        <p:nvSpPr>
+          <p:cNvPr id="81" name="Shape 72"/>
+          <p:cNvSpPr/>
+          <p:nvPr/>
+        </p:nvSpPr>
+        <p:spPr>
+          <a:xfrm>
+            <a:off x="8126913" y="5266944"/>
+            <a:ext cx="6426129" cy="7315"/>
+          </a:xfrm>
+          <a:prstGeom prst="rect">
+            <a:avLst/>
+          </a:prstGeom>
+          <a:solidFill>
+            <a:srgbClr val="D8E0E4"/>
+          </a:solidFill>
+          <a:ln w="12700">
+            <a:solidFill>
+              <a:srgbClr val="333333"/>
+            </a:solidFill>
+            <a:prstDash val="solid"/>
+          </a:ln>
+        </p:spPr>
+      </p:sp>
+      <p:sp>
+        <p:nvSpPr>
+          <p:cNvPr id="82" name="Text 73"/>
+          <p:cNvSpPr/>
+          <p:nvPr/>
+        </p:nvSpPr>
+        <p:spPr>
+          <a:xfrm>
+            <a:off x="8126913" y="5468112"/>
+            <a:ext cx="6426129" cy="256032"/>
+          </a:xfrm>
+          <a:prstGeom prst="rect">
+            <a:avLst/>
+          </a:prstGeom>
+          <a:noFill/>
+          <a:ln/>
+        </p:spPr>
+        <p:txBody>
+          <a:bodyPr wrap="square" lIns="0" tIns="0" rIns="0" bIns="0" rtlCol="0" anchor="ctr"/>
+          <a:lstStyle/>
+          <a:p>
+            <a:pPr indent="0" marL="0">
+              <a:buNone/>
+            </a:pPr>
+            <a:r>
+              <a:rPr lang="en-US" sz="1250" b="1" dirty="0">
+                <a:solidFill>
+                  <a:srgbClr val="0B3041"/>
+                </a:solidFill>
+                <a:latin typeface="游ゴシック Medium" pitchFamily="34" charset="0"/>
+                <a:ea typeface="游ゴシック Medium" pitchFamily="34" charset="-122"/>
+                <a:cs typeface="游ゴシック Medium" pitchFamily="34" charset="-120"/>
+              </a:rPr>
+              <a:t>ご成約まで、費用は一切いただきません。</a:t>
+            </a:r>
+            <a:endParaRPr lang="en-US" sz="1250" dirty="0"/>
+          </a:p>
+        </p:txBody>
+      </p:sp>
+      <p:sp>
+        <p:nvSpPr>
+          <p:cNvPr id="83" name="Shape 74"/>
+          <p:cNvSpPr/>
+          <p:nvPr/>
+        </p:nvSpPr>
+        <p:spPr>
+          <a:xfrm>
+            <a:off x="8126913" y="5815584"/>
+            <a:ext cx="1544810" cy="566928"/>
+          </a:xfrm>
+          <a:prstGeom prst="roundRect">
+            <a:avLst>
+              <a:gd name="adj" fmla="val 8065"/>
+            </a:avLst>
+          </a:prstGeom>
+          <a:solidFill>
+            <a:srgbClr val="EEF9F6"/>
+          </a:solidFill>
+          <a:ln w="10160">
+            <a:solidFill>
+              <a:srgbClr val="54CCB3"/>
+            </a:solidFill>
+            <a:prstDash val="solid"/>
+          </a:ln>
+        </p:spPr>
+      </p:sp>
+      <p:sp>
+        <p:nvSpPr>
+          <p:cNvPr id="84" name="Text 75"/>
+          <p:cNvSpPr/>
+          <p:nvPr/>
+        </p:nvSpPr>
+        <p:spPr>
+          <a:xfrm>
+            <a:off x="8126913" y="5865876"/>
+            <a:ext cx="1544810" cy="475488"/>
+          </a:xfrm>
+          <a:prstGeom prst="rect">
+            <a:avLst/>
+          </a:prstGeom>
+          <a:noFill/>
+          <a:ln/>
+        </p:spPr>
+        <p:txBody>
+          <a:bodyPr wrap="square" lIns="0" tIns="0" rIns="0" bIns="0" rtlCol="0" anchor="ctr"/>
+          <a:lstStyle/>
+          <a:p>
+            <a:pPr algn="ctr" indent="0" marL="0">
+              <a:lnSpc>
+                <a:spcPct val="116000"/>
+              </a:lnSpc>
+              <a:buNone/>
+            </a:pPr>
+            <a:r>
+              <a:rPr lang="en-US" sz="850" dirty="0">
+                <a:solidFill>
+                  <a:srgbClr val="0B3041"/>
+                </a:solidFill>
+                <a:latin typeface="游ゴシック" pitchFamily="34" charset="0"/>
+                <a:ea typeface="游ゴシック" pitchFamily="34" charset="-122"/>
+                <a:cs typeface="游ゴシック" pitchFamily="34" charset="-120"/>
+              </a:rPr>
+              <a:t>着手金</a:t>
+            </a:r>
+            <a:endParaRPr lang="en-US" sz="850" dirty="0"/>
+          </a:p>
+          <a:p>
+            <a:pPr algn="ctr" indent="0" marL="0">
+              <a:lnSpc>
+                <a:spcPct val="116000"/>
+              </a:lnSpc>
+              <a:buNone/>
+            </a:pPr>
+            <a:r>
+              <a:rPr lang="en-US" sz="1150" b="1" dirty="0">
+                <a:solidFill>
+                  <a:srgbClr val="2E9C87"/>
+                </a:solidFill>
+                <a:latin typeface="游ゴシック Medium" pitchFamily="34" charset="0"/>
+                <a:ea typeface="游ゴシック Medium" pitchFamily="34" charset="-122"/>
+                <a:cs typeface="游ゴシック Medium" pitchFamily="34" charset="-120"/>
+              </a:rPr>
+              <a:t>無料</a:t>
+            </a:r>
+            <a:endParaRPr lang="en-US" sz="850" dirty="0"/>
+          </a:p>
+        </p:txBody>
+      </p:sp>
+      <p:sp>
+        <p:nvSpPr>
+          <p:cNvPr id="85" name="Shape 76"/>
+          <p:cNvSpPr/>
+          <p:nvPr/>
+        </p:nvSpPr>
+        <p:spPr>
+          <a:xfrm>
+            <a:off x="9754019" y="5815584"/>
+            <a:ext cx="1544810" cy="566928"/>
+          </a:xfrm>
+          <a:prstGeom prst="roundRect">
+            <a:avLst>
+              <a:gd name="adj" fmla="val 8065"/>
+            </a:avLst>
+          </a:prstGeom>
+          <a:solidFill>
+            <a:srgbClr val="EEF9F6"/>
+          </a:solidFill>
+          <a:ln w="10160">
+            <a:solidFill>
+              <a:srgbClr val="54CCB3"/>
+            </a:solidFill>
+            <a:prstDash val="solid"/>
+          </a:ln>
+        </p:spPr>
+      </p:sp>
+      <p:sp>
+        <p:nvSpPr>
+          <p:cNvPr id="86" name="Text 77"/>
+          <p:cNvSpPr/>
+          <p:nvPr/>
+        </p:nvSpPr>
+        <p:spPr>
+          <a:xfrm>
+            <a:off x="9754019" y="5865876"/>
+            <a:ext cx="1544810" cy="475488"/>
+          </a:xfrm>
+          <a:prstGeom prst="rect">
+            <a:avLst/>
+          </a:prstGeom>
+          <a:noFill/>
+          <a:ln/>
+        </p:spPr>
+        <p:txBody>
+          <a:bodyPr wrap="square" lIns="0" tIns="0" rIns="0" bIns="0" rtlCol="0" anchor="ctr"/>
+          <a:lstStyle/>
+          <a:p>
+            <a:pPr algn="ctr" indent="0" marL="0">
+              <a:lnSpc>
+                <a:spcPct val="116000"/>
+              </a:lnSpc>
+              <a:buNone/>
+            </a:pPr>
+            <a:r>
+              <a:rPr lang="en-US" sz="850" dirty="0">
+                <a:solidFill>
+                  <a:srgbClr val="0B3041"/>
+                </a:solidFill>
+                <a:latin typeface="游ゴシック" pitchFamily="34" charset="0"/>
+                <a:ea typeface="游ゴシック" pitchFamily="34" charset="-122"/>
+                <a:cs typeface="游ゴシック" pitchFamily="34" charset="-120"/>
+              </a:rPr>
+              <a:t>中間報酬</a:t>
+            </a:r>
+            <a:endParaRPr lang="en-US" sz="850" dirty="0"/>
+          </a:p>
+          <a:p>
+            <a:pPr algn="ctr" indent="0" marL="0">
+              <a:lnSpc>
+                <a:spcPct val="116000"/>
+              </a:lnSpc>
+              <a:buNone/>
+            </a:pPr>
+            <a:r>
+              <a:rPr lang="en-US" sz="1150" b="1" dirty="0">
+                <a:solidFill>
+                  <a:srgbClr val="2E9C87"/>
+                </a:solidFill>
+                <a:latin typeface="游ゴシック Medium" pitchFamily="34" charset="0"/>
+                <a:ea typeface="游ゴシック Medium" pitchFamily="34" charset="-122"/>
+                <a:cs typeface="游ゴシック Medium" pitchFamily="34" charset="-120"/>
+              </a:rPr>
+              <a:t>無料</a:t>
+            </a:r>
+            <a:endParaRPr lang="en-US" sz="850" dirty="0"/>
+          </a:p>
+        </p:txBody>
+      </p:sp>
+      <p:sp>
+        <p:nvSpPr>
+          <p:cNvPr id="87" name="Shape 78"/>
+          <p:cNvSpPr/>
+          <p:nvPr/>
+        </p:nvSpPr>
+        <p:spPr>
+          <a:xfrm>
+            <a:off x="11381125" y="5815584"/>
+            <a:ext cx="1544810" cy="566928"/>
+          </a:xfrm>
+          <a:prstGeom prst="roundRect">
+            <a:avLst>
+              <a:gd name="adj" fmla="val 8065"/>
+            </a:avLst>
+          </a:prstGeom>
+          <a:solidFill>
+            <a:srgbClr val="EEF9F6"/>
+          </a:solidFill>
+          <a:ln w="10160">
+            <a:solidFill>
+              <a:srgbClr val="54CCB3"/>
+            </a:solidFill>
+            <a:prstDash val="solid"/>
+          </a:ln>
+        </p:spPr>
+      </p:sp>
+      <p:sp>
+        <p:nvSpPr>
+          <p:cNvPr id="88" name="Text 79"/>
+          <p:cNvSpPr/>
+          <p:nvPr/>
+        </p:nvSpPr>
+        <p:spPr>
+          <a:xfrm>
+            <a:off x="11381125" y="5865876"/>
+            <a:ext cx="1544810" cy="475488"/>
+          </a:xfrm>
+          <a:prstGeom prst="rect">
+            <a:avLst/>
+          </a:prstGeom>
+          <a:noFill/>
+          <a:ln/>
+        </p:spPr>
+        <p:txBody>
+          <a:bodyPr wrap="square" lIns="0" tIns="0" rIns="0" bIns="0" rtlCol="0" anchor="ctr"/>
+          <a:lstStyle/>
+          <a:p>
+            <a:pPr algn="ctr" indent="0" marL="0">
+              <a:lnSpc>
+                <a:spcPct val="116000"/>
+              </a:lnSpc>
+              <a:buNone/>
+            </a:pPr>
+            <a:r>
+              <a:rPr lang="en-US" sz="850" dirty="0">
+                <a:solidFill>
+                  <a:srgbClr val="0B3041"/>
+                </a:solidFill>
+                <a:latin typeface="游ゴシック" pitchFamily="34" charset="0"/>
+                <a:ea typeface="游ゴシック" pitchFamily="34" charset="-122"/>
+                <a:cs typeface="游ゴシック" pitchFamily="34" charset="-120"/>
+              </a:rPr>
+              <a:t>企業評価料</a:t>
+            </a:r>
+            <a:endParaRPr lang="en-US" sz="850" dirty="0"/>
+          </a:p>
+          <a:p>
+            <a:pPr algn="ctr" indent="0" marL="0">
+              <a:lnSpc>
+                <a:spcPct val="116000"/>
+              </a:lnSpc>
+              <a:buNone/>
+            </a:pPr>
+            <a:r>
+              <a:rPr lang="en-US" sz="1150" b="1" dirty="0">
+                <a:solidFill>
+                  <a:srgbClr val="2E9C87"/>
+                </a:solidFill>
+                <a:latin typeface="游ゴシック Medium" pitchFamily="34" charset="0"/>
+                <a:ea typeface="游ゴシック Medium" pitchFamily="34" charset="-122"/>
+                <a:cs typeface="游ゴシック Medium" pitchFamily="34" charset="-120"/>
+              </a:rPr>
+              <a:t>無料</a:t>
+            </a:r>
+            <a:endParaRPr lang="en-US" sz="850" dirty="0"/>
+          </a:p>
+        </p:txBody>
+      </p:sp>
+      <p:sp>
+        <p:nvSpPr>
+          <p:cNvPr id="89" name="Shape 80"/>
+          <p:cNvSpPr/>
+          <p:nvPr/>
+        </p:nvSpPr>
+        <p:spPr>
+          <a:xfrm>
+            <a:off x="13008232" y="5815584"/>
+            <a:ext cx="1544810" cy="566928"/>
+          </a:xfrm>
+          <a:prstGeom prst="roundRect">
+            <a:avLst>
+              <a:gd name="adj" fmla="val 8065"/>
+            </a:avLst>
+          </a:prstGeom>
+          <a:solidFill>
+            <a:srgbClr val="EEF9F6"/>
+          </a:solidFill>
+          <a:ln w="10160">
+            <a:solidFill>
+              <a:srgbClr val="54CCB3"/>
+            </a:solidFill>
+            <a:prstDash val="solid"/>
+          </a:ln>
+        </p:spPr>
+      </p:sp>
+      <p:sp>
+        <p:nvSpPr>
+          <p:cNvPr id="90" name="Text 81"/>
+          <p:cNvSpPr/>
+          <p:nvPr/>
+        </p:nvSpPr>
+        <p:spPr>
+          <a:xfrm>
+            <a:off x="13008232" y="5865876"/>
+            <a:ext cx="1544810" cy="475488"/>
+          </a:xfrm>
+          <a:prstGeom prst="rect">
+            <a:avLst/>
+          </a:prstGeom>
+          <a:noFill/>
+          <a:ln/>
+        </p:spPr>
+        <p:txBody>
+          <a:bodyPr wrap="square" lIns="0" tIns="0" rIns="0" bIns="0" rtlCol="0" anchor="ctr"/>
+          <a:lstStyle/>
+          <a:p>
+            <a:pPr algn="ctr" indent="0" marL="0">
+              <a:lnSpc>
+                <a:spcPct val="116000"/>
+              </a:lnSpc>
+              <a:buNone/>
+            </a:pPr>
+            <a:r>
+              <a:rPr lang="en-US" sz="850" dirty="0">
+                <a:solidFill>
+                  <a:srgbClr val="0B3041"/>
+                </a:solidFill>
+                <a:latin typeface="游ゴシック" pitchFamily="34" charset="0"/>
+                <a:ea typeface="游ゴシック" pitchFamily="34" charset="-122"/>
+                <a:cs typeface="游ゴシック" pitchFamily="34" charset="-120"/>
+              </a:rPr>
+              <a:t>案件化料</a:t>
+            </a:r>
+            <a:endParaRPr lang="en-US" sz="850" dirty="0"/>
+          </a:p>
+          <a:p>
+            <a:pPr algn="ctr" indent="0" marL="0">
+              <a:lnSpc>
+                <a:spcPct val="116000"/>
+              </a:lnSpc>
+              <a:buNone/>
+            </a:pPr>
+            <a:r>
+              <a:rPr lang="en-US" sz="1150" b="1" dirty="0">
+                <a:solidFill>
+                  <a:srgbClr val="2E9C87"/>
+                </a:solidFill>
+                <a:latin typeface="游ゴシック Medium" pitchFamily="34" charset="0"/>
+                <a:ea typeface="游ゴシック Medium" pitchFamily="34" charset="-122"/>
+                <a:cs typeface="游ゴシック Medium" pitchFamily="34" charset="-120"/>
+              </a:rPr>
+              <a:t>無料</a:t>
+            </a:r>
+            <a:endParaRPr lang="en-US" sz="850" dirty="0"/>
+          </a:p>
+        </p:txBody>
+      </p:sp>
+      <p:sp>
+        <p:nvSpPr>
+          <p:cNvPr id="91" name="Shape 82"/>
+          <p:cNvSpPr/>
+          <p:nvPr/>
+        </p:nvSpPr>
+        <p:spPr>
+          <a:xfrm>
+            <a:off x="9699681" y="6547104"/>
+            <a:ext cx="1617787" cy="310896"/>
+          </a:xfrm>
+          <a:prstGeom prst="rect">
+            <a:avLst/>
           </a:prstGeom>
           <a:solidFill>
             <a:srgbClr val="0B3041"/>
@@ -6169,30 +7399,30 @@
       </p:sp>
       <p:sp>
         <p:nvSpPr>
-          <p:cNvPr id="62" name="Text 56"/>
-          <p:cNvSpPr/>
-          <p:nvPr/>
-        </p:nvSpPr>
-        <p:spPr>
-          <a:xfrm>
-            <a:off x="8382945" y="2249424"/>
-            <a:ext cx="5914065" cy="256032"/>
-          </a:xfrm>
-          <a:prstGeom prst="rect">
-            <a:avLst/>
-          </a:prstGeom>
-          <a:noFill/>
-          <a:ln/>
-        </p:spPr>
-        <p:txBody>
-          <a:bodyPr wrap="square" lIns="0" tIns="0" rIns="0" bIns="0" rtlCol="0" anchor="ctr"/>
-          <a:lstStyle/>
-          <a:p>
-            <a:pPr indent="0" marL="0">
-              <a:buNone/>
-            </a:pPr>
-            <a:r>
-              <a:rPr lang="en-US" sz="1200" b="1" dirty="0">
+          <p:cNvPr id="92" name="Text 83"/>
+          <p:cNvSpPr/>
+          <p:nvPr/>
+        </p:nvSpPr>
+        <p:spPr>
+          <a:xfrm>
+            <a:off x="9699681" y="6547104"/>
+            <a:ext cx="1617787" cy="310896"/>
+          </a:xfrm>
+          <a:prstGeom prst="rect">
+            <a:avLst/>
+          </a:prstGeom>
+          <a:noFill/>
+          <a:ln/>
+        </p:spPr>
+        <p:txBody>
+          <a:bodyPr wrap="square" lIns="0" tIns="0" rIns="0" bIns="0" rtlCol="0" anchor="ctr"/>
+          <a:lstStyle/>
+          <a:p>
+            <a:pPr algn="ctr" indent="0" marL="0">
+              <a:buNone/>
+            </a:pPr>
+            <a:r>
+              <a:rPr lang="en-US" sz="900" b="1" dirty="0">
                 <a:solidFill>
                   <a:srgbClr val="FFFFFF"/>
                 </a:solidFill>
@@ -6200,146 +7430,38 @@
                 <a:ea typeface="游ゴシック Medium" pitchFamily="34" charset="-122"/>
                 <a:cs typeface="游ゴシック Medium" pitchFamily="34" charset="-120"/>
               </a:rPr>
-              <a:t>M&amp;A仲介・アドバイザリー</a:t>
-            </a:r>
-            <a:endParaRPr lang="en-US" sz="1200" dirty="0"/>
-          </a:p>
-        </p:txBody>
-      </p:sp>
-      <p:sp>
-        <p:nvSpPr>
-          <p:cNvPr id="63" name="Text 57"/>
-          <p:cNvSpPr/>
-          <p:nvPr/>
-        </p:nvSpPr>
-        <p:spPr>
-          <a:xfrm>
-            <a:off x="8382945" y="2523744"/>
-            <a:ext cx="5914065" cy="420624"/>
-          </a:xfrm>
-          <a:prstGeom prst="rect">
-            <a:avLst/>
-          </a:prstGeom>
-          <a:noFill/>
-          <a:ln/>
-        </p:spPr>
-        <p:txBody>
-          <a:bodyPr wrap="square" lIns="0" tIns="0" rIns="0" bIns="0" rtlCol="0" anchor="ctr"/>
-          <a:lstStyle/>
-          <a:p>
-            <a:pPr indent="0" marL="0">
-              <a:lnSpc>
-                <a:spcPct val="142000"/>
-              </a:lnSpc>
-              <a:buNone/>
-            </a:pPr>
-            <a:r>
-              <a:rPr lang="en-US" sz="850" dirty="0">
-                <a:solidFill>
-                  <a:srgbClr val="C2D4DC"/>
-                </a:solidFill>
-                <a:latin typeface="游ゴシック" pitchFamily="34" charset="0"/>
-                <a:ea typeface="游ゴシック" pitchFamily="34" charset="-122"/>
-                <a:cs typeface="游ゴシック" pitchFamily="34" charset="-120"/>
-              </a:rPr>
-              <a:t>譲渡（事業承継・成長戦略）と譲受（買収・資本提携）の双方を支援。株式譲渡・事業譲渡に加え、会社分割や二段階譲渡など目的に応じたスキームを設計します。</a:t>
-            </a:r>
-            <a:endParaRPr lang="en-US" sz="850" dirty="0"/>
-          </a:p>
-        </p:txBody>
-      </p:sp>
-      <p:sp>
-        <p:nvSpPr>
-          <p:cNvPr id="64" name="Text 58"/>
-          <p:cNvSpPr/>
-          <p:nvPr/>
-        </p:nvSpPr>
-        <p:spPr>
-          <a:xfrm>
-            <a:off x="8126913" y="3163824"/>
-            <a:ext cx="6426129" cy="219456"/>
-          </a:xfrm>
-          <a:prstGeom prst="rect">
-            <a:avLst/>
-          </a:prstGeom>
-          <a:noFill/>
-          <a:ln/>
-        </p:spPr>
-        <p:txBody>
-          <a:bodyPr wrap="square" lIns="0" tIns="0" rIns="0" bIns="0" rtlCol="0" anchor="ctr"/>
-          <a:lstStyle/>
-          <a:p>
-            <a:pPr indent="0" marL="0">
-              <a:buNone/>
-            </a:pPr>
-            <a:r>
-              <a:rPr lang="en-US" sz="850" dirty="0">
-                <a:solidFill>
-                  <a:srgbClr val="5A6670"/>
-                </a:solidFill>
-                <a:latin typeface="游ゴシック" pitchFamily="34" charset="0"/>
-                <a:ea typeface="游ゴシック" pitchFamily="34" charset="-122"/>
-                <a:cs typeface="游ゴシック" pitchFamily="34" charset="-120"/>
-              </a:rPr>
-              <a:t>M&amp;A以外の経営課題も、提携先ネットワークでワンストップにご相談いただけます。</a:t>
-            </a:r>
-            <a:endParaRPr lang="en-US" sz="850" dirty="0"/>
-          </a:p>
-        </p:txBody>
-      </p:sp>
-      <p:sp>
-        <p:nvSpPr>
-          <p:cNvPr id="65" name="Shape 59"/>
-          <p:cNvSpPr/>
-          <p:nvPr/>
-        </p:nvSpPr>
-        <p:spPr>
-          <a:xfrm>
-            <a:off x="8126913" y="3474720"/>
-            <a:ext cx="2068891" cy="1207008"/>
-          </a:xfrm>
-          <a:prstGeom prst="roundRect">
-            <a:avLst>
-              <a:gd name="adj" fmla="val 3788"/>
-            </a:avLst>
-          </a:prstGeom>
-          <a:solidFill>
-            <a:srgbClr val="F7FAFB"/>
-          </a:solidFill>
-          <a:ln w="7620">
-            <a:solidFill>
-              <a:srgbClr val="E2EAEE"/>
-            </a:solidFill>
-            <a:prstDash val="solid"/>
-          </a:ln>
-        </p:spPr>
-      </p:sp>
-      <p:sp>
-        <p:nvSpPr>
-          <p:cNvPr id="66" name="Text 60"/>
-          <p:cNvSpPr/>
-          <p:nvPr/>
-        </p:nvSpPr>
-        <p:spPr>
-          <a:xfrm>
-            <a:off x="8273217" y="3593592"/>
-            <a:ext cx="1776283" cy="219456"/>
-          </a:xfrm>
-          <a:prstGeom prst="rect">
-            <a:avLst/>
-          </a:prstGeom>
-          <a:noFill/>
-          <a:ln/>
-        </p:spPr>
-        <p:txBody>
-          <a:bodyPr wrap="square" lIns="0" tIns="0" rIns="0" bIns="0" rtlCol="0" anchor="ctr"/>
-          <a:lstStyle/>
-          <a:p>
-            <a:pPr indent="0" marL="0">
-              <a:buNone/>
-            </a:pPr>
-            <a:r>
-              <a:rPr lang="en-US" sz="950" b="1" dirty="0">
+              <a:t>当社</a:t>
+            </a:r>
+            <a:endParaRPr lang="en-US" sz="900" dirty="0"/>
+          </a:p>
+        </p:txBody>
+      </p:sp>
+      <p:sp>
+        <p:nvSpPr>
+          <p:cNvPr id="93" name="Text 84"/>
+          <p:cNvSpPr/>
+          <p:nvPr/>
+        </p:nvSpPr>
+        <p:spPr>
+          <a:xfrm>
+            <a:off x="11317468" y="6547104"/>
+            <a:ext cx="1617787" cy="310896"/>
+          </a:xfrm>
+          <a:prstGeom prst="rect">
+            <a:avLst/>
+          </a:prstGeom>
+          <a:noFill/>
+          <a:ln/>
+        </p:spPr>
+        <p:txBody>
+          <a:bodyPr wrap="square" lIns="0" tIns="0" rIns="0" bIns="0" rtlCol="0" anchor="ctr"/>
+          <a:lstStyle/>
+          <a:p>
+            <a:pPr algn="ctr" indent="0" marL="0">
+              <a:buNone/>
+            </a:pPr>
+            <a:r>
+              <a:rPr lang="en-US" sz="900" b="1" dirty="0">
                 <a:solidFill>
                   <a:srgbClr val="0B3041"/>
                 </a:solidFill>
@@ -6347,172 +7469,38 @@
                 <a:ea typeface="游ゴシック Medium" pitchFamily="34" charset="-122"/>
                 <a:cs typeface="游ゴシック Medium" pitchFamily="34" charset="-120"/>
               </a:rPr>
-              <a:t>財務・資金繰り支援</a:t>
-            </a:r>
-            <a:endParaRPr lang="en-US" sz="950" dirty="0"/>
-          </a:p>
-        </p:txBody>
-      </p:sp>
-      <p:sp>
-        <p:nvSpPr>
-          <p:cNvPr id="67" name="Shape 61"/>
-          <p:cNvSpPr/>
-          <p:nvPr/>
-        </p:nvSpPr>
-        <p:spPr>
-          <a:xfrm>
-            <a:off x="8273217" y="3849624"/>
-            <a:ext cx="1776283" cy="7315"/>
-          </a:xfrm>
-          <a:prstGeom prst="rect">
-            <a:avLst/>
-          </a:prstGeom>
-          <a:solidFill>
-            <a:srgbClr val="D3E2E7"/>
-          </a:solidFill>
-          <a:ln w="12700">
-            <a:solidFill>
-              <a:srgbClr val="333333"/>
-            </a:solidFill>
-            <a:prstDash val="solid"/>
-          </a:ln>
-        </p:spPr>
-      </p:sp>
-      <p:sp>
-        <p:nvSpPr>
-          <p:cNvPr id="68" name="Text 62"/>
-          <p:cNvSpPr/>
-          <p:nvPr/>
-        </p:nvSpPr>
-        <p:spPr>
-          <a:xfrm>
-            <a:off x="8273217" y="3913632"/>
-            <a:ext cx="1776283" cy="713232"/>
-          </a:xfrm>
-          <a:prstGeom prst="rect">
-            <a:avLst/>
-          </a:prstGeom>
-          <a:noFill/>
-          <a:ln/>
-        </p:spPr>
-        <p:txBody>
-          <a:bodyPr wrap="square" lIns="0" tIns="0" rIns="0" bIns="0" rtlCol="0" anchor="ctr"/>
-          <a:lstStyle/>
-          <a:p>
-            <a:pPr indent="0" marL="0">
-              <a:lnSpc>
-                <a:spcPct val="150000"/>
-              </a:lnSpc>
-              <a:buNone/>
-            </a:pPr>
-            <a:r>
-              <a:rPr lang="en-US" sz="800" dirty="0">
-                <a:solidFill>
-                  <a:srgbClr val="5A6670"/>
-                </a:solidFill>
-                <a:latin typeface="游ゴシック" pitchFamily="34" charset="0"/>
-                <a:ea typeface="游ゴシック" pitchFamily="34" charset="-122"/>
-                <a:cs typeface="游ゴシック" pitchFamily="34" charset="-120"/>
-              </a:rPr>
-              <a:t>資金調達・資金繰り改善</a:t>
-            </a:r>
-            <a:endParaRPr lang="en-US" sz="800" dirty="0"/>
-          </a:p>
-          <a:p>
-            <a:pPr indent="0" marL="0">
-              <a:lnSpc>
-                <a:spcPct val="150000"/>
-              </a:lnSpc>
-              <a:buNone/>
-            </a:pPr>
-            <a:r>
-              <a:rPr lang="en-US" sz="800" dirty="0">
-                <a:solidFill>
-                  <a:srgbClr val="5A6670"/>
-                </a:solidFill>
-                <a:latin typeface="游ゴシック" pitchFamily="34" charset="0"/>
-                <a:ea typeface="游ゴシック" pitchFamily="34" charset="-122"/>
-                <a:cs typeface="游ゴシック" pitchFamily="34" charset="-120"/>
-              </a:rPr>
-              <a:t>財務コンサルティング</a:t>
-            </a:r>
-            <a:endParaRPr lang="en-US" sz="800" dirty="0"/>
-          </a:p>
-          <a:p>
-            <a:pPr indent="0" marL="0">
-              <a:lnSpc>
-                <a:spcPct val="150000"/>
-              </a:lnSpc>
-              <a:buNone/>
-            </a:pPr>
-            <a:r>
-              <a:rPr lang="en-US" sz="800" dirty="0">
-                <a:solidFill>
-                  <a:srgbClr val="5A6670"/>
-                </a:solidFill>
-                <a:latin typeface="游ゴシック" pitchFamily="34" charset="0"/>
-                <a:ea typeface="游ゴシック" pitchFamily="34" charset="-122"/>
-                <a:cs typeface="游ゴシック" pitchFamily="34" charset="-120"/>
-              </a:rPr>
-              <a:t>事業再生・スポンサー探索</a:t>
-            </a:r>
-            <a:endParaRPr lang="en-US" sz="800" dirty="0"/>
-          </a:p>
-        </p:txBody>
-      </p:sp>
-      <p:sp>
-        <p:nvSpPr>
-          <p:cNvPr id="69" name="Shape 63"/>
-          <p:cNvSpPr/>
-          <p:nvPr/>
-        </p:nvSpPr>
-        <p:spPr>
-          <a:xfrm>
-            <a:off x="10305532" y="3474720"/>
-            <a:ext cx="2068891" cy="1207008"/>
-          </a:xfrm>
-          <a:prstGeom prst="roundRect">
-            <a:avLst>
-              <a:gd name="adj" fmla="val 3788"/>
-            </a:avLst>
-          </a:prstGeom>
-          <a:solidFill>
-            <a:srgbClr val="F7FAFB"/>
-          </a:solidFill>
-          <a:ln w="7620">
-            <a:solidFill>
-              <a:srgbClr val="E2EAEE"/>
-            </a:solidFill>
-            <a:prstDash val="solid"/>
-          </a:ln>
-        </p:spPr>
-      </p:sp>
-      <p:sp>
-        <p:nvSpPr>
-          <p:cNvPr id="70" name="Text 64"/>
-          <p:cNvSpPr/>
-          <p:nvPr/>
-        </p:nvSpPr>
-        <p:spPr>
-          <a:xfrm>
-            <a:off x="10451836" y="3593592"/>
-            <a:ext cx="1776283" cy="219456"/>
-          </a:xfrm>
-          <a:prstGeom prst="rect">
-            <a:avLst/>
-          </a:prstGeom>
-          <a:noFill/>
-          <a:ln/>
-        </p:spPr>
-        <p:txBody>
-          <a:bodyPr wrap="square" lIns="0" tIns="0" rIns="0" bIns="0" rtlCol="0" anchor="ctr"/>
-          <a:lstStyle/>
-          <a:p>
-            <a:pPr indent="0" marL="0">
-              <a:buNone/>
-            </a:pPr>
-            <a:r>
-              <a:rPr lang="en-US" sz="950" b="1" dirty="0">
+              <a:t>大手A社</a:t>
+            </a:r>
+            <a:endParaRPr lang="en-US" sz="900" dirty="0"/>
+          </a:p>
+        </p:txBody>
+      </p:sp>
+      <p:sp>
+        <p:nvSpPr>
+          <p:cNvPr id="94" name="Text 85"/>
+          <p:cNvSpPr/>
+          <p:nvPr/>
+        </p:nvSpPr>
+        <p:spPr>
+          <a:xfrm>
+            <a:off x="12935255" y="6547104"/>
+            <a:ext cx="1617787" cy="310896"/>
+          </a:xfrm>
+          <a:prstGeom prst="rect">
+            <a:avLst/>
+          </a:prstGeom>
+          <a:noFill/>
+          <a:ln/>
+        </p:spPr>
+        <p:txBody>
+          <a:bodyPr wrap="square" lIns="0" tIns="0" rIns="0" bIns="0" rtlCol="0" anchor="ctr"/>
+          <a:lstStyle/>
+          <a:p>
+            <a:pPr algn="ctr" indent="0" marL="0">
+              <a:buNone/>
+            </a:pPr>
+            <a:r>
+              <a:rPr lang="en-US" sz="900" b="1" dirty="0">
                 <a:solidFill>
                   <a:srgbClr val="0B3041"/>
                 </a:solidFill>
@@ -6520,849 +7508,7 @@
                 <a:ea typeface="游ゴシック Medium" pitchFamily="34" charset="-122"/>
                 <a:cs typeface="游ゴシック Medium" pitchFamily="34" charset="-120"/>
               </a:rPr>
-              <a:t>成長支援</a:t>
-            </a:r>
-            <a:endParaRPr lang="en-US" sz="950" dirty="0"/>
-          </a:p>
-        </p:txBody>
-      </p:sp>
-      <p:sp>
-        <p:nvSpPr>
-          <p:cNvPr id="71" name="Shape 65"/>
-          <p:cNvSpPr/>
-          <p:nvPr/>
-        </p:nvSpPr>
-        <p:spPr>
-          <a:xfrm>
-            <a:off x="10451836" y="3849624"/>
-            <a:ext cx="1776283" cy="7315"/>
-          </a:xfrm>
-          <a:prstGeom prst="rect">
-            <a:avLst/>
-          </a:prstGeom>
-          <a:solidFill>
-            <a:srgbClr val="D3E2E7"/>
-          </a:solidFill>
-          <a:ln w="12700">
-            <a:solidFill>
-              <a:srgbClr val="333333"/>
-            </a:solidFill>
-            <a:prstDash val="solid"/>
-          </a:ln>
-        </p:spPr>
-      </p:sp>
-      <p:sp>
-        <p:nvSpPr>
-          <p:cNvPr id="72" name="Text 66"/>
-          <p:cNvSpPr/>
-          <p:nvPr/>
-        </p:nvSpPr>
-        <p:spPr>
-          <a:xfrm>
-            <a:off x="10451836" y="3913632"/>
-            <a:ext cx="1776283" cy="713232"/>
-          </a:xfrm>
-          <a:prstGeom prst="rect">
-            <a:avLst/>
-          </a:prstGeom>
-          <a:noFill/>
-          <a:ln/>
-        </p:spPr>
-        <p:txBody>
-          <a:bodyPr wrap="square" lIns="0" tIns="0" rIns="0" bIns="0" rtlCol="0" anchor="ctr"/>
-          <a:lstStyle/>
-          <a:p>
-            <a:pPr indent="0" marL="0">
-              <a:lnSpc>
-                <a:spcPct val="150000"/>
-              </a:lnSpc>
-              <a:buNone/>
-            </a:pPr>
-            <a:r>
-              <a:rPr lang="en-US" sz="800" dirty="0">
-                <a:solidFill>
-                  <a:srgbClr val="5A6670"/>
-                </a:solidFill>
-                <a:latin typeface="游ゴシック" pitchFamily="34" charset="0"/>
-                <a:ea typeface="游ゴシック" pitchFamily="34" charset="-122"/>
-                <a:cs typeface="游ゴシック" pitchFamily="34" charset="-120"/>
-              </a:rPr>
-              <a:t>成長戦略・DX・IT支援</a:t>
-            </a:r>
-            <a:endParaRPr lang="en-US" sz="800" dirty="0"/>
-          </a:p>
-          <a:p>
-            <a:pPr indent="0" marL="0">
-              <a:lnSpc>
-                <a:spcPct val="150000"/>
-              </a:lnSpc>
-              <a:buNone/>
-            </a:pPr>
-            <a:r>
-              <a:rPr lang="en-US" sz="800" dirty="0">
-                <a:solidFill>
-                  <a:srgbClr val="5A6670"/>
-                </a:solidFill>
-                <a:latin typeface="游ゴシック" pitchFamily="34" charset="0"/>
-                <a:ea typeface="游ゴシック" pitchFamily="34" charset="-122"/>
-                <a:cs typeface="游ゴシック" pitchFamily="34" charset="-120"/>
-              </a:rPr>
-              <a:t>人材・組織構築</a:t>
-            </a:r>
-            <a:endParaRPr lang="en-US" sz="800" dirty="0"/>
-          </a:p>
-          <a:p>
-            <a:pPr indent="0" marL="0">
-              <a:lnSpc>
-                <a:spcPct val="150000"/>
-              </a:lnSpc>
-              <a:buNone/>
-            </a:pPr>
-            <a:r>
-              <a:rPr lang="en-US" sz="800" dirty="0">
-                <a:solidFill>
-                  <a:srgbClr val="5A6670"/>
-                </a:solidFill>
-                <a:latin typeface="游ゴシック" pitchFamily="34" charset="0"/>
-                <a:ea typeface="游ゴシック" pitchFamily="34" charset="-122"/>
-                <a:cs typeface="游ゴシック" pitchFamily="34" charset="-120"/>
-              </a:rPr>
-              <a:t>BPO・業務効率化</a:t>
-            </a:r>
-            <a:endParaRPr lang="en-US" sz="800" dirty="0"/>
-          </a:p>
-        </p:txBody>
-      </p:sp>
-      <p:sp>
-        <p:nvSpPr>
-          <p:cNvPr id="73" name="Shape 67"/>
-          <p:cNvSpPr/>
-          <p:nvPr/>
-        </p:nvSpPr>
-        <p:spPr>
-          <a:xfrm>
-            <a:off x="12484151" y="3474720"/>
-            <a:ext cx="2068891" cy="1207008"/>
-          </a:xfrm>
-          <a:prstGeom prst="roundRect">
-            <a:avLst>
-              <a:gd name="adj" fmla="val 3788"/>
-            </a:avLst>
-          </a:prstGeom>
-          <a:solidFill>
-            <a:srgbClr val="F7FAFB"/>
-          </a:solidFill>
-          <a:ln w="7620">
-            <a:solidFill>
-              <a:srgbClr val="E2EAEE"/>
-            </a:solidFill>
-            <a:prstDash val="solid"/>
-          </a:ln>
-        </p:spPr>
-      </p:sp>
-      <p:sp>
-        <p:nvSpPr>
-          <p:cNvPr id="74" name="Text 68"/>
-          <p:cNvSpPr/>
-          <p:nvPr/>
-        </p:nvSpPr>
-        <p:spPr>
-          <a:xfrm>
-            <a:off x="12630455" y="3593592"/>
-            <a:ext cx="1776283" cy="219456"/>
-          </a:xfrm>
-          <a:prstGeom prst="rect">
-            <a:avLst/>
-          </a:prstGeom>
-          <a:noFill/>
-          <a:ln/>
-        </p:spPr>
-        <p:txBody>
-          <a:bodyPr wrap="square" lIns="0" tIns="0" rIns="0" bIns="0" rtlCol="0" anchor="ctr"/>
-          <a:lstStyle/>
-          <a:p>
-            <a:pPr indent="0" marL="0">
-              <a:buNone/>
-            </a:pPr>
-            <a:r>
-              <a:rPr lang="en-US" sz="950" b="1" dirty="0">
-                <a:solidFill>
-                  <a:srgbClr val="0B3041"/>
-                </a:solidFill>
-                <a:latin typeface="游ゴシック Medium" pitchFamily="34" charset="0"/>
-                <a:ea typeface="游ゴシック Medium" pitchFamily="34" charset="-122"/>
-                <a:cs typeface="游ゴシック Medium" pitchFamily="34" charset="-120"/>
-              </a:rPr>
-              <a:t>譲渡後のサポート</a:t>
-            </a:r>
-            <a:endParaRPr lang="en-US" sz="950" dirty="0"/>
-          </a:p>
-        </p:txBody>
-      </p:sp>
-      <p:sp>
-        <p:nvSpPr>
-          <p:cNvPr id="75" name="Shape 69"/>
-          <p:cNvSpPr/>
-          <p:nvPr/>
-        </p:nvSpPr>
-        <p:spPr>
-          <a:xfrm>
-            <a:off x="12630455" y="3849624"/>
-            <a:ext cx="1776283" cy="7315"/>
-          </a:xfrm>
-          <a:prstGeom prst="rect">
-            <a:avLst/>
-          </a:prstGeom>
-          <a:solidFill>
-            <a:srgbClr val="D3E2E7"/>
-          </a:solidFill>
-          <a:ln w="12700">
-            <a:solidFill>
-              <a:srgbClr val="333333"/>
-            </a:solidFill>
-            <a:prstDash val="solid"/>
-          </a:ln>
-        </p:spPr>
-      </p:sp>
-      <p:sp>
-        <p:nvSpPr>
-          <p:cNvPr id="76" name="Text 70"/>
-          <p:cNvSpPr/>
-          <p:nvPr/>
-        </p:nvSpPr>
-        <p:spPr>
-          <a:xfrm>
-            <a:off x="12630455" y="3913632"/>
-            <a:ext cx="1776283" cy="713232"/>
-          </a:xfrm>
-          <a:prstGeom prst="rect">
-            <a:avLst/>
-          </a:prstGeom>
-          <a:noFill/>
-          <a:ln/>
-        </p:spPr>
-        <p:txBody>
-          <a:bodyPr wrap="square" lIns="0" tIns="0" rIns="0" bIns="0" rtlCol="0" anchor="ctr"/>
-          <a:lstStyle/>
-          <a:p>
-            <a:pPr indent="0" marL="0">
-              <a:lnSpc>
-                <a:spcPct val="150000"/>
-              </a:lnSpc>
-              <a:buNone/>
-            </a:pPr>
-            <a:r>
-              <a:rPr lang="en-US" sz="800" dirty="0">
-                <a:solidFill>
-                  <a:srgbClr val="5A6670"/>
-                </a:solidFill>
-                <a:latin typeface="游ゴシック" pitchFamily="34" charset="0"/>
-                <a:ea typeface="游ゴシック" pitchFamily="34" charset="-122"/>
-                <a:cs typeface="游ゴシック" pitchFamily="34" charset="-120"/>
-              </a:rPr>
-              <a:t>資産運用・保険</a:t>
-            </a:r>
-            <a:endParaRPr lang="en-US" sz="800" dirty="0"/>
-          </a:p>
-          <a:p>
-            <a:pPr indent="0" marL="0">
-              <a:lnSpc>
-                <a:spcPct val="150000"/>
-              </a:lnSpc>
-              <a:buNone/>
-            </a:pPr>
-            <a:r>
-              <a:rPr lang="en-US" sz="800" dirty="0">
-                <a:solidFill>
-                  <a:srgbClr val="5A6670"/>
-                </a:solidFill>
-                <a:latin typeface="游ゴシック" pitchFamily="34" charset="0"/>
-                <a:ea typeface="游ゴシック" pitchFamily="34" charset="-122"/>
-                <a:cs typeface="游ゴシック" pitchFamily="34" charset="-120"/>
-              </a:rPr>
-              <a:t>不動産のご紹介</a:t>
-            </a:r>
-            <a:endParaRPr lang="en-US" sz="800" dirty="0"/>
-          </a:p>
-          <a:p>
-            <a:pPr indent="0" marL="0">
-              <a:lnSpc>
-                <a:spcPct val="150000"/>
-              </a:lnSpc>
-              <a:buNone/>
-            </a:pPr>
-            <a:r>
-              <a:rPr lang="en-US" sz="800" dirty="0">
-                <a:solidFill>
-                  <a:srgbClr val="5A6670"/>
-                </a:solidFill>
-                <a:latin typeface="游ゴシック" pitchFamily="34" charset="0"/>
-                <a:ea typeface="游ゴシック" pitchFamily="34" charset="-122"/>
-                <a:cs typeface="游ゴシック" pitchFamily="34" charset="-120"/>
-              </a:rPr>
-              <a:t>税務・専門家との連携</a:t>
-            </a:r>
-            <a:endParaRPr lang="en-US" sz="800" dirty="0"/>
-          </a:p>
-        </p:txBody>
-      </p:sp>
-      <p:sp>
-        <p:nvSpPr>
-          <p:cNvPr id="77" name="Text 71"/>
-          <p:cNvSpPr/>
-          <p:nvPr/>
-        </p:nvSpPr>
-        <p:spPr>
-          <a:xfrm>
-            <a:off x="8126913" y="4956048"/>
-            <a:ext cx="3855677" cy="237744"/>
-          </a:xfrm>
-          <a:prstGeom prst="rect">
-            <a:avLst/>
-          </a:prstGeom>
-          <a:noFill/>
-          <a:ln/>
-        </p:spPr>
-        <p:txBody>
-          <a:bodyPr wrap="square" lIns="0" tIns="0" rIns="0" bIns="0" rtlCol="0" anchor="ctr"/>
-          <a:lstStyle/>
-          <a:p>
-            <a:pPr indent="0" marL="0">
-              <a:buNone/>
-            </a:pPr>
-            <a:r>
-              <a:rPr lang="en-US" sz="1250" b="1" dirty="0">
-                <a:solidFill>
-                  <a:srgbClr val="0B3041"/>
-                </a:solidFill>
-                <a:latin typeface="游ゴシック Medium" pitchFamily="34" charset="0"/>
-                <a:ea typeface="游ゴシック Medium" pitchFamily="34" charset="-122"/>
-                <a:cs typeface="游ゴシック Medium" pitchFamily="34" charset="-120"/>
-              </a:rPr>
-              <a:t>料金体系｜完全成功報酬型</a:t>
-            </a:r>
-            <a:endParaRPr lang="en-US" sz="1250" dirty="0"/>
-          </a:p>
-        </p:txBody>
-      </p:sp>
-      <p:sp>
-        <p:nvSpPr>
-          <p:cNvPr id="78" name="Text 72"/>
-          <p:cNvSpPr/>
-          <p:nvPr/>
-        </p:nvSpPr>
-        <p:spPr>
-          <a:xfrm>
-            <a:off x="11982590" y="4997196"/>
-            <a:ext cx="2570452" cy="201168"/>
-          </a:xfrm>
-          <a:prstGeom prst="rect">
-            <a:avLst/>
-          </a:prstGeom>
-          <a:noFill/>
-          <a:ln/>
-        </p:spPr>
-        <p:txBody>
-          <a:bodyPr wrap="square" lIns="0" tIns="0" rIns="0" bIns="0" rtlCol="0" anchor="ctr"/>
-          <a:lstStyle/>
-          <a:p>
-            <a:pPr algn="r" indent="0" marL="0">
-              <a:buNone/>
-            </a:pPr>
-            <a:r>
-              <a:rPr lang="en-US" sz="750" spc="180" kern="0" dirty="0">
-                <a:solidFill>
-                  <a:srgbClr val="8A959D"/>
-                </a:solidFill>
-                <a:latin typeface="Arial" pitchFamily="34" charset="0"/>
-                <a:ea typeface="游ゴシック" pitchFamily="34" charset="-122"/>
-                <a:cs typeface="Arial" pitchFamily="34" charset="-120"/>
-              </a:rPr>
-              <a:t>FEE</a:t>
-            </a:r>
-            <a:endParaRPr lang="en-US" sz="750" dirty="0"/>
-          </a:p>
-        </p:txBody>
-      </p:sp>
-      <p:sp>
-        <p:nvSpPr>
-          <p:cNvPr id="79" name="Shape 73"/>
-          <p:cNvSpPr/>
-          <p:nvPr/>
-        </p:nvSpPr>
-        <p:spPr>
-          <a:xfrm>
-            <a:off x="8126913" y="5230368"/>
-            <a:ext cx="6426129" cy="7315"/>
-          </a:xfrm>
-          <a:prstGeom prst="rect">
-            <a:avLst/>
-          </a:prstGeom>
-          <a:solidFill>
-            <a:srgbClr val="D8E0E4"/>
-          </a:solidFill>
-          <a:ln w="12700">
-            <a:solidFill>
-              <a:srgbClr val="333333"/>
-            </a:solidFill>
-            <a:prstDash val="solid"/>
-          </a:ln>
-        </p:spPr>
-      </p:sp>
-      <p:sp>
-        <p:nvSpPr>
-          <p:cNvPr id="80" name="Text 74"/>
-          <p:cNvSpPr/>
-          <p:nvPr/>
-        </p:nvSpPr>
-        <p:spPr>
-          <a:xfrm>
-            <a:off x="8126913" y="5431536"/>
-            <a:ext cx="6426129" cy="256032"/>
-          </a:xfrm>
-          <a:prstGeom prst="rect">
-            <a:avLst/>
-          </a:prstGeom>
-          <a:noFill/>
-          <a:ln/>
-        </p:spPr>
-        <p:txBody>
-          <a:bodyPr wrap="square" lIns="0" tIns="0" rIns="0" bIns="0" rtlCol="0" anchor="ctr"/>
-          <a:lstStyle/>
-          <a:p>
-            <a:pPr indent="0" marL="0">
-              <a:buNone/>
-            </a:pPr>
-            <a:r>
-              <a:rPr lang="en-US" sz="1250" b="1" dirty="0">
-                <a:solidFill>
-                  <a:srgbClr val="0B3041"/>
-                </a:solidFill>
-                <a:latin typeface="游ゴシック Medium" pitchFamily="34" charset="0"/>
-                <a:ea typeface="游ゴシック Medium" pitchFamily="34" charset="-122"/>
-                <a:cs typeface="游ゴシック Medium" pitchFamily="34" charset="-120"/>
-              </a:rPr>
-              <a:t>ご成約まで、費用は一切いただきません。</a:t>
-            </a:r>
-            <a:endParaRPr lang="en-US" sz="1250" dirty="0"/>
-          </a:p>
-        </p:txBody>
-      </p:sp>
-      <p:sp>
-        <p:nvSpPr>
-          <p:cNvPr id="81" name="Shape 75"/>
-          <p:cNvSpPr/>
-          <p:nvPr/>
-        </p:nvSpPr>
-        <p:spPr>
-          <a:xfrm>
-            <a:off x="8126913" y="5779008"/>
-            <a:ext cx="1544810" cy="566928"/>
-          </a:xfrm>
-          <a:prstGeom prst="roundRect">
-            <a:avLst>
-              <a:gd name="adj" fmla="val 8065"/>
-            </a:avLst>
-          </a:prstGeom>
-          <a:solidFill>
-            <a:srgbClr val="EEF9F6"/>
-          </a:solidFill>
-          <a:ln w="10160">
-            <a:solidFill>
-              <a:srgbClr val="54CCB3"/>
-            </a:solidFill>
-            <a:prstDash val="solid"/>
-          </a:ln>
-        </p:spPr>
-      </p:sp>
-      <p:sp>
-        <p:nvSpPr>
-          <p:cNvPr id="82" name="Text 76"/>
-          <p:cNvSpPr/>
-          <p:nvPr/>
-        </p:nvSpPr>
-        <p:spPr>
-          <a:xfrm>
-            <a:off x="8126913" y="5829300"/>
-            <a:ext cx="1544810" cy="475488"/>
-          </a:xfrm>
-          <a:prstGeom prst="rect">
-            <a:avLst/>
-          </a:prstGeom>
-          <a:noFill/>
-          <a:ln/>
-        </p:spPr>
-        <p:txBody>
-          <a:bodyPr wrap="square" lIns="0" tIns="0" rIns="0" bIns="0" rtlCol="0" anchor="ctr"/>
-          <a:lstStyle/>
-          <a:p>
-            <a:pPr algn="ctr" indent="0" marL="0">
-              <a:lnSpc>
-                <a:spcPct val="116000"/>
-              </a:lnSpc>
-              <a:buNone/>
-            </a:pPr>
-            <a:r>
-              <a:rPr lang="en-US" sz="850" dirty="0">
-                <a:solidFill>
-                  <a:srgbClr val="0B3041"/>
-                </a:solidFill>
-                <a:latin typeface="游ゴシック" pitchFamily="34" charset="0"/>
-                <a:ea typeface="游ゴシック" pitchFamily="34" charset="-122"/>
-                <a:cs typeface="游ゴシック" pitchFamily="34" charset="-120"/>
-              </a:rPr>
-              <a:t>着手金</a:t>
-            </a:r>
-            <a:endParaRPr lang="en-US" sz="850" dirty="0"/>
-          </a:p>
-          <a:p>
-            <a:pPr algn="ctr" indent="0" marL="0">
-              <a:lnSpc>
-                <a:spcPct val="116000"/>
-              </a:lnSpc>
-              <a:buNone/>
-            </a:pPr>
-            <a:r>
-              <a:rPr lang="en-US" sz="1150" b="1" dirty="0">
-                <a:solidFill>
-                  <a:srgbClr val="2E9C87"/>
-                </a:solidFill>
-                <a:latin typeface="游ゴシック Medium" pitchFamily="34" charset="0"/>
-                <a:ea typeface="游ゴシック Medium" pitchFamily="34" charset="-122"/>
-                <a:cs typeface="游ゴシック Medium" pitchFamily="34" charset="-120"/>
-              </a:rPr>
-              <a:t>無料</a:t>
-            </a:r>
-            <a:endParaRPr lang="en-US" sz="850" dirty="0"/>
-          </a:p>
-        </p:txBody>
-      </p:sp>
-      <p:sp>
-        <p:nvSpPr>
-          <p:cNvPr id="83" name="Shape 77"/>
-          <p:cNvSpPr/>
-          <p:nvPr/>
-        </p:nvSpPr>
-        <p:spPr>
-          <a:xfrm>
-            <a:off x="9754019" y="5779008"/>
-            <a:ext cx="1544810" cy="566928"/>
-          </a:xfrm>
-          <a:prstGeom prst="roundRect">
-            <a:avLst>
-              <a:gd name="adj" fmla="val 8065"/>
-            </a:avLst>
-          </a:prstGeom>
-          <a:solidFill>
-            <a:srgbClr val="EEF9F6"/>
-          </a:solidFill>
-          <a:ln w="10160">
-            <a:solidFill>
-              <a:srgbClr val="54CCB3"/>
-            </a:solidFill>
-            <a:prstDash val="solid"/>
-          </a:ln>
-        </p:spPr>
-      </p:sp>
-      <p:sp>
-        <p:nvSpPr>
-          <p:cNvPr id="84" name="Text 78"/>
-          <p:cNvSpPr/>
-          <p:nvPr/>
-        </p:nvSpPr>
-        <p:spPr>
-          <a:xfrm>
-            <a:off x="9754019" y="5829300"/>
-            <a:ext cx="1544810" cy="475488"/>
-          </a:xfrm>
-          <a:prstGeom prst="rect">
-            <a:avLst/>
-          </a:prstGeom>
-          <a:noFill/>
-          <a:ln/>
-        </p:spPr>
-        <p:txBody>
-          <a:bodyPr wrap="square" lIns="0" tIns="0" rIns="0" bIns="0" rtlCol="0" anchor="ctr"/>
-          <a:lstStyle/>
-          <a:p>
-            <a:pPr algn="ctr" indent="0" marL="0">
-              <a:lnSpc>
-                <a:spcPct val="116000"/>
-              </a:lnSpc>
-              <a:buNone/>
-            </a:pPr>
-            <a:r>
-              <a:rPr lang="en-US" sz="850" dirty="0">
-                <a:solidFill>
-                  <a:srgbClr val="0B3041"/>
-                </a:solidFill>
-                <a:latin typeface="游ゴシック" pitchFamily="34" charset="0"/>
-                <a:ea typeface="游ゴシック" pitchFamily="34" charset="-122"/>
-                <a:cs typeface="游ゴシック" pitchFamily="34" charset="-120"/>
-              </a:rPr>
-              <a:t>中間報酬</a:t>
-            </a:r>
-            <a:endParaRPr lang="en-US" sz="850" dirty="0"/>
-          </a:p>
-          <a:p>
-            <a:pPr algn="ctr" indent="0" marL="0">
-              <a:lnSpc>
-                <a:spcPct val="116000"/>
-              </a:lnSpc>
-              <a:buNone/>
-            </a:pPr>
-            <a:r>
-              <a:rPr lang="en-US" sz="1150" b="1" dirty="0">
-                <a:solidFill>
-                  <a:srgbClr val="2E9C87"/>
-                </a:solidFill>
-                <a:latin typeface="游ゴシック Medium" pitchFamily="34" charset="0"/>
-                <a:ea typeface="游ゴシック Medium" pitchFamily="34" charset="-122"/>
-                <a:cs typeface="游ゴシック Medium" pitchFamily="34" charset="-120"/>
-              </a:rPr>
-              <a:t>無料</a:t>
-            </a:r>
-            <a:endParaRPr lang="en-US" sz="850" dirty="0"/>
-          </a:p>
-        </p:txBody>
-      </p:sp>
-      <p:sp>
-        <p:nvSpPr>
-          <p:cNvPr id="85" name="Shape 79"/>
-          <p:cNvSpPr/>
-          <p:nvPr/>
-        </p:nvSpPr>
-        <p:spPr>
-          <a:xfrm>
-            <a:off x="11381125" y="5779008"/>
-            <a:ext cx="1544810" cy="566928"/>
-          </a:xfrm>
-          <a:prstGeom prst="roundRect">
-            <a:avLst>
-              <a:gd name="adj" fmla="val 8065"/>
-            </a:avLst>
-          </a:prstGeom>
-          <a:solidFill>
-            <a:srgbClr val="EEF9F6"/>
-          </a:solidFill>
-          <a:ln w="10160">
-            <a:solidFill>
-              <a:srgbClr val="54CCB3"/>
-            </a:solidFill>
-            <a:prstDash val="solid"/>
-          </a:ln>
-        </p:spPr>
-      </p:sp>
-      <p:sp>
-        <p:nvSpPr>
-          <p:cNvPr id="86" name="Text 80"/>
-          <p:cNvSpPr/>
-          <p:nvPr/>
-        </p:nvSpPr>
-        <p:spPr>
-          <a:xfrm>
-            <a:off x="11381125" y="5829300"/>
-            <a:ext cx="1544810" cy="475488"/>
-          </a:xfrm>
-          <a:prstGeom prst="rect">
-            <a:avLst/>
-          </a:prstGeom>
-          <a:noFill/>
-          <a:ln/>
-        </p:spPr>
-        <p:txBody>
-          <a:bodyPr wrap="square" lIns="0" tIns="0" rIns="0" bIns="0" rtlCol="0" anchor="ctr"/>
-          <a:lstStyle/>
-          <a:p>
-            <a:pPr algn="ctr" indent="0" marL="0">
-              <a:lnSpc>
-                <a:spcPct val="116000"/>
-              </a:lnSpc>
-              <a:buNone/>
-            </a:pPr>
-            <a:r>
-              <a:rPr lang="en-US" sz="850" dirty="0">
-                <a:solidFill>
-                  <a:srgbClr val="0B3041"/>
-                </a:solidFill>
-                <a:latin typeface="游ゴシック" pitchFamily="34" charset="0"/>
-                <a:ea typeface="游ゴシック" pitchFamily="34" charset="-122"/>
-                <a:cs typeface="游ゴシック" pitchFamily="34" charset="-120"/>
-              </a:rPr>
-              <a:t>企業評価料</a:t>
-            </a:r>
-            <a:endParaRPr lang="en-US" sz="850" dirty="0"/>
-          </a:p>
-          <a:p>
-            <a:pPr algn="ctr" indent="0" marL="0">
-              <a:lnSpc>
-                <a:spcPct val="116000"/>
-              </a:lnSpc>
-              <a:buNone/>
-            </a:pPr>
-            <a:r>
-              <a:rPr lang="en-US" sz="1150" b="1" dirty="0">
-                <a:solidFill>
-                  <a:srgbClr val="2E9C87"/>
-                </a:solidFill>
-                <a:latin typeface="游ゴシック Medium" pitchFamily="34" charset="0"/>
-                <a:ea typeface="游ゴシック Medium" pitchFamily="34" charset="-122"/>
-                <a:cs typeface="游ゴシック Medium" pitchFamily="34" charset="-120"/>
-              </a:rPr>
-              <a:t>無料</a:t>
-            </a:r>
-            <a:endParaRPr lang="en-US" sz="850" dirty="0"/>
-          </a:p>
-        </p:txBody>
-      </p:sp>
-      <p:sp>
-        <p:nvSpPr>
-          <p:cNvPr id="87" name="Shape 81"/>
-          <p:cNvSpPr/>
-          <p:nvPr/>
-        </p:nvSpPr>
-        <p:spPr>
-          <a:xfrm>
-            <a:off x="13008232" y="5779008"/>
-            <a:ext cx="1544810" cy="566928"/>
-          </a:xfrm>
-          <a:prstGeom prst="roundRect">
-            <a:avLst>
-              <a:gd name="adj" fmla="val 8065"/>
-            </a:avLst>
-          </a:prstGeom>
-          <a:solidFill>
-            <a:srgbClr val="EEF9F6"/>
-          </a:solidFill>
-          <a:ln w="10160">
-            <a:solidFill>
-              <a:srgbClr val="54CCB3"/>
-            </a:solidFill>
-            <a:prstDash val="solid"/>
-          </a:ln>
-        </p:spPr>
-      </p:sp>
-      <p:sp>
-        <p:nvSpPr>
-          <p:cNvPr id="88" name="Text 82"/>
-          <p:cNvSpPr/>
-          <p:nvPr/>
-        </p:nvSpPr>
-        <p:spPr>
-          <a:xfrm>
-            <a:off x="13008232" y="5829300"/>
-            <a:ext cx="1544810" cy="475488"/>
-          </a:xfrm>
-          <a:prstGeom prst="rect">
-            <a:avLst/>
-          </a:prstGeom>
-          <a:noFill/>
-          <a:ln/>
-        </p:spPr>
-        <p:txBody>
-          <a:bodyPr wrap="square" lIns="0" tIns="0" rIns="0" bIns="0" rtlCol="0" anchor="ctr"/>
-          <a:lstStyle/>
-          <a:p>
-            <a:pPr algn="ctr" indent="0" marL="0">
-              <a:lnSpc>
-                <a:spcPct val="116000"/>
-              </a:lnSpc>
-              <a:buNone/>
-            </a:pPr>
-            <a:r>
-              <a:rPr lang="en-US" sz="850" dirty="0">
-                <a:solidFill>
-                  <a:srgbClr val="0B3041"/>
-                </a:solidFill>
-                <a:latin typeface="游ゴシック" pitchFamily="34" charset="0"/>
-                <a:ea typeface="游ゴシック" pitchFamily="34" charset="-122"/>
-                <a:cs typeface="游ゴシック" pitchFamily="34" charset="-120"/>
-              </a:rPr>
-              <a:t>案件化料</a:t>
-            </a:r>
-            <a:endParaRPr lang="en-US" sz="850" dirty="0"/>
-          </a:p>
-          <a:p>
-            <a:pPr algn="ctr" indent="0" marL="0">
-              <a:lnSpc>
-                <a:spcPct val="116000"/>
-              </a:lnSpc>
-              <a:buNone/>
-            </a:pPr>
-            <a:r>
-              <a:rPr lang="en-US" sz="1150" b="1" dirty="0">
-                <a:solidFill>
-                  <a:srgbClr val="2E9C87"/>
-                </a:solidFill>
-                <a:latin typeface="游ゴシック Medium" pitchFamily="34" charset="0"/>
-                <a:ea typeface="游ゴシック Medium" pitchFamily="34" charset="-122"/>
-                <a:cs typeface="游ゴシック Medium" pitchFamily="34" charset="-120"/>
-              </a:rPr>
-              <a:t>無料</a:t>
-            </a:r>
-            <a:endParaRPr lang="en-US" sz="850" dirty="0"/>
-          </a:p>
-        </p:txBody>
-      </p:sp>
-      <p:sp>
-        <p:nvSpPr>
-          <p:cNvPr id="89" name="Shape 83"/>
-          <p:cNvSpPr/>
-          <p:nvPr/>
-        </p:nvSpPr>
-        <p:spPr>
-          <a:xfrm>
-            <a:off x="9699681" y="6510528"/>
-            <a:ext cx="1617787" cy="310896"/>
-          </a:xfrm>
-          <a:prstGeom prst="rect">
-            <a:avLst/>
-          </a:prstGeom>
-          <a:solidFill>
-            <a:srgbClr val="0B3041"/>
-          </a:solidFill>
-          <a:ln w="12700">
-            <a:solidFill>
-              <a:srgbClr val="333333"/>
-            </a:solidFill>
-            <a:prstDash val="solid"/>
-          </a:ln>
-        </p:spPr>
-      </p:sp>
-      <p:sp>
-        <p:nvSpPr>
-          <p:cNvPr id="90" name="Text 84"/>
-          <p:cNvSpPr/>
-          <p:nvPr/>
-        </p:nvSpPr>
-        <p:spPr>
-          <a:xfrm>
-            <a:off x="9699681" y="6510528"/>
-            <a:ext cx="1617787" cy="310896"/>
-          </a:xfrm>
-          <a:prstGeom prst="rect">
-            <a:avLst/>
-          </a:prstGeom>
-          <a:noFill/>
-          <a:ln/>
-        </p:spPr>
-        <p:txBody>
-          <a:bodyPr wrap="square" lIns="0" tIns="0" rIns="0" bIns="0" rtlCol="0" anchor="ctr"/>
-          <a:lstStyle/>
-          <a:p>
-            <a:pPr algn="ctr" indent="0" marL="0">
-              <a:buNone/>
-            </a:pPr>
-            <a:r>
-              <a:rPr lang="en-US" sz="900" b="1" dirty="0">
-                <a:solidFill>
-                  <a:srgbClr val="FFFFFF"/>
-                </a:solidFill>
-                <a:latin typeface="游ゴシック Medium" pitchFamily="34" charset="0"/>
-                <a:ea typeface="游ゴシック Medium" pitchFamily="34" charset="-122"/>
-                <a:cs typeface="游ゴシック Medium" pitchFamily="34" charset="-120"/>
-              </a:rPr>
-              <a:t>当社</a:t>
+              <a:t>大手B社</a:t>
             </a:r>
             <a:endParaRPr lang="en-US" sz="900" dirty="0"/>
           </a:p>
@@ -7370,91 +7516,13 @@
       </p:sp>
       <p:sp>
         <p:nvSpPr>
-          <p:cNvPr id="91" name="Text 85"/>
-          <p:cNvSpPr/>
-          <p:nvPr/>
-        </p:nvSpPr>
-        <p:spPr>
-          <a:xfrm>
-            <a:off x="11317468" y="6510528"/>
-            <a:ext cx="1617787" cy="310896"/>
-          </a:xfrm>
-          <a:prstGeom prst="rect">
-            <a:avLst/>
-          </a:prstGeom>
-          <a:noFill/>
-          <a:ln/>
-        </p:spPr>
-        <p:txBody>
-          <a:bodyPr wrap="square" lIns="0" tIns="0" rIns="0" bIns="0" rtlCol="0" anchor="ctr"/>
-          <a:lstStyle/>
-          <a:p>
-            <a:pPr algn="ctr" indent="0" marL="0">
-              <a:buNone/>
-            </a:pPr>
-            <a:r>
-              <a:rPr lang="en-US" sz="900" b="1" dirty="0">
-                <a:solidFill>
-                  <a:srgbClr val="0B3041"/>
-                </a:solidFill>
-                <a:latin typeface="游ゴシック Medium" pitchFamily="34" charset="0"/>
-                <a:ea typeface="游ゴシック Medium" pitchFamily="34" charset="-122"/>
-                <a:cs typeface="游ゴシック Medium" pitchFamily="34" charset="-120"/>
-              </a:rPr>
-              <a:t>大手A社</a:t>
-            </a:r>
-            <a:endParaRPr lang="en-US" sz="900" dirty="0"/>
-          </a:p>
-        </p:txBody>
-      </p:sp>
-      <p:sp>
-        <p:nvSpPr>
-          <p:cNvPr id="92" name="Text 86"/>
-          <p:cNvSpPr/>
-          <p:nvPr/>
-        </p:nvSpPr>
-        <p:spPr>
-          <a:xfrm>
-            <a:off x="12935255" y="6510528"/>
-            <a:ext cx="1617787" cy="310896"/>
-          </a:xfrm>
-          <a:prstGeom prst="rect">
-            <a:avLst/>
-          </a:prstGeom>
-          <a:noFill/>
-          <a:ln/>
-        </p:spPr>
-        <p:txBody>
-          <a:bodyPr wrap="square" lIns="0" tIns="0" rIns="0" bIns="0" rtlCol="0" anchor="ctr"/>
-          <a:lstStyle/>
-          <a:p>
-            <a:pPr algn="ctr" indent="0" marL="0">
-              <a:buNone/>
-            </a:pPr>
-            <a:r>
-              <a:rPr lang="en-US" sz="900" b="1" dirty="0">
-                <a:solidFill>
-                  <a:srgbClr val="0B3041"/>
-                </a:solidFill>
-                <a:latin typeface="游ゴシック Medium" pitchFamily="34" charset="0"/>
-                <a:ea typeface="游ゴシック Medium" pitchFamily="34" charset="-122"/>
-                <a:cs typeface="游ゴシック Medium" pitchFamily="34" charset="-120"/>
-              </a:rPr>
-              <a:t>大手B社</a:t>
-            </a:r>
-            <a:endParaRPr lang="en-US" sz="900" dirty="0"/>
-          </a:p>
-        </p:txBody>
-      </p:sp>
-      <p:sp>
-        <p:nvSpPr>
-          <p:cNvPr id="93" name="Shape 87"/>
-          <p:cNvSpPr/>
-          <p:nvPr/>
-        </p:nvSpPr>
-        <p:spPr>
-          <a:xfrm>
-            <a:off x="9699681" y="6821424"/>
+          <p:cNvPr id="95" name="Shape 86"/>
+          <p:cNvSpPr/>
+          <p:nvPr/>
+        </p:nvSpPr>
+        <p:spPr>
+          <a:xfrm>
+            <a:off x="9699681" y="6858000"/>
             <a:ext cx="1617787" cy="457200"/>
           </a:xfrm>
           <a:prstGeom prst="rect">
@@ -7473,13 +7541,13 @@
       </p:sp>
       <p:sp>
         <p:nvSpPr>
-          <p:cNvPr id="94" name="Text 88"/>
-          <p:cNvSpPr/>
-          <p:nvPr/>
-        </p:nvSpPr>
-        <p:spPr>
-          <a:xfrm>
-            <a:off x="8126913" y="6821424"/>
+          <p:cNvPr id="96" name="Text 87"/>
+          <p:cNvSpPr/>
+          <p:nvPr/>
+        </p:nvSpPr>
+        <p:spPr>
+          <a:xfrm>
+            <a:off x="8126913" y="6858000"/>
             <a:ext cx="1463040" cy="457200"/>
           </a:xfrm>
           <a:prstGeom prst="rect">
@@ -7512,13 +7580,13 @@
       </p:sp>
       <p:sp>
         <p:nvSpPr>
-          <p:cNvPr id="95" name="Text 89"/>
-          <p:cNvSpPr/>
-          <p:nvPr/>
-        </p:nvSpPr>
-        <p:spPr>
-          <a:xfrm>
-            <a:off x="9699681" y="6821424"/>
+          <p:cNvPr id="97" name="Text 88"/>
+          <p:cNvSpPr/>
+          <p:nvPr/>
+        </p:nvSpPr>
+        <p:spPr>
+          <a:xfrm>
+            <a:off x="9699681" y="6858000"/>
             <a:ext cx="1617787" cy="457200"/>
           </a:xfrm>
           <a:prstGeom prst="rect">
@@ -7554,13 +7622,13 @@
       </p:sp>
       <p:sp>
         <p:nvSpPr>
-          <p:cNvPr id="96" name="Text 90"/>
-          <p:cNvSpPr/>
-          <p:nvPr/>
-        </p:nvSpPr>
-        <p:spPr>
-          <a:xfrm>
-            <a:off x="11317468" y="6821424"/>
+          <p:cNvPr id="98" name="Text 89"/>
+          <p:cNvSpPr/>
+          <p:nvPr/>
+        </p:nvSpPr>
+        <p:spPr>
+          <a:xfrm>
+            <a:off x="11317468" y="6858000"/>
             <a:ext cx="1617787" cy="457200"/>
           </a:xfrm>
           <a:prstGeom prst="rect">
@@ -7616,13 +7684,13 @@
       </p:sp>
       <p:sp>
         <p:nvSpPr>
-          <p:cNvPr id="97" name="Text 91"/>
-          <p:cNvSpPr/>
-          <p:nvPr/>
-        </p:nvSpPr>
-        <p:spPr>
-          <a:xfrm>
-            <a:off x="12935255" y="6821424"/>
+          <p:cNvPr id="99" name="Text 90"/>
+          <p:cNvSpPr/>
+          <p:nvPr/>
+        </p:nvSpPr>
+        <p:spPr>
+          <a:xfrm>
+            <a:off x="12935255" y="6858000"/>
             <a:ext cx="1617787" cy="457200"/>
           </a:xfrm>
           <a:prstGeom prst="rect">
@@ -7678,13 +7746,13 @@
       </p:sp>
       <p:sp>
         <p:nvSpPr>
-          <p:cNvPr id="98" name="Shape 92"/>
-          <p:cNvSpPr/>
-          <p:nvPr/>
-        </p:nvSpPr>
-        <p:spPr>
-          <a:xfrm>
-            <a:off x="8126913" y="7278624"/>
+          <p:cNvPr id="100" name="Shape 91"/>
+          <p:cNvSpPr/>
+          <p:nvPr/>
+        </p:nvSpPr>
+        <p:spPr>
+          <a:xfrm>
+            <a:off x="8126913" y="7315200"/>
             <a:ext cx="6426129" cy="7315"/>
           </a:xfrm>
           <a:prstGeom prst="rect">
@@ -7703,13 +7771,13 @@
       </p:sp>
       <p:sp>
         <p:nvSpPr>
-          <p:cNvPr id="99" name="Shape 93"/>
-          <p:cNvSpPr/>
-          <p:nvPr/>
-        </p:nvSpPr>
-        <p:spPr>
-          <a:xfrm>
-            <a:off x="9699681" y="7278624"/>
+          <p:cNvPr id="101" name="Shape 92"/>
+          <p:cNvSpPr/>
+          <p:nvPr/>
+        </p:nvSpPr>
+        <p:spPr>
+          <a:xfrm>
+            <a:off x="9699681" y="7315200"/>
             <a:ext cx="1617787" cy="329184"/>
           </a:xfrm>
           <a:prstGeom prst="rect">
@@ -7728,13 +7796,13 @@
       </p:sp>
       <p:sp>
         <p:nvSpPr>
-          <p:cNvPr id="100" name="Text 94"/>
-          <p:cNvSpPr/>
-          <p:nvPr/>
-        </p:nvSpPr>
-        <p:spPr>
-          <a:xfrm>
-            <a:off x="8126913" y="7278624"/>
+          <p:cNvPr id="102" name="Text 93"/>
+          <p:cNvSpPr/>
+          <p:nvPr/>
+        </p:nvSpPr>
+        <p:spPr>
+          <a:xfrm>
+            <a:off x="8126913" y="7315200"/>
             <a:ext cx="1463040" cy="329184"/>
           </a:xfrm>
           <a:prstGeom prst="rect">
@@ -7767,13 +7835,13 @@
       </p:sp>
       <p:sp>
         <p:nvSpPr>
-          <p:cNvPr id="101" name="Text 95"/>
-          <p:cNvSpPr/>
-          <p:nvPr/>
-        </p:nvSpPr>
-        <p:spPr>
-          <a:xfrm>
-            <a:off x="9699681" y="7278624"/>
+          <p:cNvPr id="103" name="Text 94"/>
+          <p:cNvSpPr/>
+          <p:nvPr/>
+        </p:nvSpPr>
+        <p:spPr>
+          <a:xfrm>
+            <a:off x="9699681" y="7315200"/>
             <a:ext cx="1617787" cy="329184"/>
           </a:xfrm>
           <a:prstGeom prst="rect">
@@ -7809,13 +7877,13 @@
       </p:sp>
       <p:sp>
         <p:nvSpPr>
-          <p:cNvPr id="102" name="Text 96"/>
-          <p:cNvSpPr/>
-          <p:nvPr/>
-        </p:nvSpPr>
-        <p:spPr>
-          <a:xfrm>
-            <a:off x="11317468" y="7278624"/>
+          <p:cNvPr id="104" name="Text 95"/>
+          <p:cNvSpPr/>
+          <p:nvPr/>
+        </p:nvSpPr>
+        <p:spPr>
+          <a:xfrm>
+            <a:off x="11317468" y="7315200"/>
             <a:ext cx="1617787" cy="329184"/>
           </a:xfrm>
           <a:prstGeom prst="rect">
@@ -7851,13 +7919,13 @@
       </p:sp>
       <p:sp>
         <p:nvSpPr>
-          <p:cNvPr id="103" name="Text 97"/>
-          <p:cNvSpPr/>
-          <p:nvPr/>
-        </p:nvSpPr>
-        <p:spPr>
-          <a:xfrm>
-            <a:off x="12935255" y="7278624"/>
+          <p:cNvPr id="105" name="Text 96"/>
+          <p:cNvSpPr/>
+          <p:nvPr/>
+        </p:nvSpPr>
+        <p:spPr>
+          <a:xfrm>
+            <a:off x="12935255" y="7315200"/>
             <a:ext cx="1617787" cy="329184"/>
           </a:xfrm>
           <a:prstGeom prst="rect">
@@ -7893,13 +7961,13 @@
       </p:sp>
       <p:sp>
         <p:nvSpPr>
-          <p:cNvPr id="104" name="Shape 98"/>
-          <p:cNvSpPr/>
-          <p:nvPr/>
-        </p:nvSpPr>
-        <p:spPr>
-          <a:xfrm>
-            <a:off x="8126913" y="7607808"/>
+          <p:cNvPr id="106" name="Shape 97"/>
+          <p:cNvSpPr/>
+          <p:nvPr/>
+        </p:nvSpPr>
+        <p:spPr>
+          <a:xfrm>
+            <a:off x="8126913" y="7644384"/>
             <a:ext cx="6426129" cy="7315"/>
           </a:xfrm>
           <a:prstGeom prst="rect">
@@ -7918,13 +7986,13 @@
       </p:sp>
       <p:sp>
         <p:nvSpPr>
-          <p:cNvPr id="105" name="Shape 99"/>
-          <p:cNvSpPr/>
-          <p:nvPr/>
-        </p:nvSpPr>
-        <p:spPr>
-          <a:xfrm>
-            <a:off x="9699681" y="7607808"/>
+          <p:cNvPr id="107" name="Shape 98"/>
+          <p:cNvSpPr/>
+          <p:nvPr/>
+        </p:nvSpPr>
+        <p:spPr>
+          <a:xfrm>
+            <a:off x="9699681" y="7644384"/>
             <a:ext cx="1617787" cy="329184"/>
           </a:xfrm>
           <a:prstGeom prst="rect">
@@ -7943,13 +8011,13 @@
       </p:sp>
       <p:sp>
         <p:nvSpPr>
-          <p:cNvPr id="106" name="Text 100"/>
-          <p:cNvSpPr/>
-          <p:nvPr/>
-        </p:nvSpPr>
-        <p:spPr>
-          <a:xfrm>
-            <a:off x="8126913" y="7607808"/>
+          <p:cNvPr id="108" name="Text 99"/>
+          <p:cNvSpPr/>
+          <p:nvPr/>
+        </p:nvSpPr>
+        <p:spPr>
+          <a:xfrm>
+            <a:off x="8126913" y="7644384"/>
             <a:ext cx="1463040" cy="329184"/>
           </a:xfrm>
           <a:prstGeom prst="rect">
@@ -7982,13 +8050,13 @@
       </p:sp>
       <p:sp>
         <p:nvSpPr>
-          <p:cNvPr id="107" name="Text 101"/>
-          <p:cNvSpPr/>
-          <p:nvPr/>
-        </p:nvSpPr>
-        <p:spPr>
-          <a:xfrm>
-            <a:off x="9699681" y="7607808"/>
+          <p:cNvPr id="109" name="Text 100"/>
+          <p:cNvSpPr/>
+          <p:nvPr/>
+        </p:nvSpPr>
+        <p:spPr>
+          <a:xfrm>
+            <a:off x="9699681" y="7644384"/>
             <a:ext cx="1617787" cy="329184"/>
           </a:xfrm>
           <a:prstGeom prst="rect">
@@ -8024,13 +8092,13 @@
       </p:sp>
       <p:sp>
         <p:nvSpPr>
-          <p:cNvPr id="108" name="Text 102"/>
-          <p:cNvSpPr/>
-          <p:nvPr/>
-        </p:nvSpPr>
-        <p:spPr>
-          <a:xfrm>
-            <a:off x="11317468" y="7607808"/>
+          <p:cNvPr id="110" name="Text 101"/>
+          <p:cNvSpPr/>
+          <p:nvPr/>
+        </p:nvSpPr>
+        <p:spPr>
+          <a:xfrm>
+            <a:off x="11317468" y="7644384"/>
             <a:ext cx="1617787" cy="329184"/>
           </a:xfrm>
           <a:prstGeom prst="rect">
@@ -8066,13 +8134,13 @@
       </p:sp>
       <p:sp>
         <p:nvSpPr>
-          <p:cNvPr id="109" name="Text 103"/>
-          <p:cNvSpPr/>
-          <p:nvPr/>
-        </p:nvSpPr>
-        <p:spPr>
-          <a:xfrm>
-            <a:off x="12935255" y="7607808"/>
+          <p:cNvPr id="111" name="Text 102"/>
+          <p:cNvSpPr/>
+          <p:nvPr/>
+        </p:nvSpPr>
+        <p:spPr>
+          <a:xfrm>
+            <a:off x="12935255" y="7644384"/>
             <a:ext cx="1617787" cy="329184"/>
           </a:xfrm>
           <a:prstGeom prst="rect">
@@ -8108,13 +8176,13 @@
       </p:sp>
       <p:sp>
         <p:nvSpPr>
-          <p:cNvPr id="110" name="Shape 104"/>
-          <p:cNvSpPr/>
-          <p:nvPr/>
-        </p:nvSpPr>
-        <p:spPr>
-          <a:xfrm>
-            <a:off x="8126913" y="7936992"/>
+          <p:cNvPr id="112" name="Shape 103"/>
+          <p:cNvSpPr/>
+          <p:nvPr/>
+        </p:nvSpPr>
+        <p:spPr>
+          <a:xfrm>
+            <a:off x="8126913" y="7973568"/>
             <a:ext cx="6426129" cy="7315"/>
           </a:xfrm>
           <a:prstGeom prst="rect">
@@ -8133,13 +8201,13 @@
       </p:sp>
       <p:sp>
         <p:nvSpPr>
-          <p:cNvPr id="111" name="Shape 105"/>
-          <p:cNvSpPr/>
-          <p:nvPr/>
-        </p:nvSpPr>
-        <p:spPr>
-          <a:xfrm>
-            <a:off x="9699681" y="7936992"/>
+          <p:cNvPr id="113" name="Shape 104"/>
+          <p:cNvSpPr/>
+          <p:nvPr/>
+        </p:nvSpPr>
+        <p:spPr>
+          <a:xfrm>
+            <a:off x="9699681" y="7973568"/>
             <a:ext cx="1617787" cy="329184"/>
           </a:xfrm>
           <a:prstGeom prst="rect">
@@ -8158,13 +8226,13 @@
       </p:sp>
       <p:sp>
         <p:nvSpPr>
-          <p:cNvPr id="112" name="Text 106"/>
-          <p:cNvSpPr/>
-          <p:nvPr/>
-        </p:nvSpPr>
-        <p:spPr>
-          <a:xfrm>
-            <a:off x="8126913" y="7936992"/>
+          <p:cNvPr id="114" name="Text 105"/>
+          <p:cNvSpPr/>
+          <p:nvPr/>
+        </p:nvSpPr>
+        <p:spPr>
+          <a:xfrm>
+            <a:off x="8126913" y="7973568"/>
             <a:ext cx="1463040" cy="329184"/>
           </a:xfrm>
           <a:prstGeom prst="rect">
@@ -8197,13 +8265,13 @@
       </p:sp>
       <p:sp>
         <p:nvSpPr>
-          <p:cNvPr id="113" name="Text 107"/>
-          <p:cNvSpPr/>
-          <p:nvPr/>
-        </p:nvSpPr>
-        <p:spPr>
-          <a:xfrm>
-            <a:off x="9699681" y="7936992"/>
+          <p:cNvPr id="115" name="Text 106"/>
+          <p:cNvSpPr/>
+          <p:nvPr/>
+        </p:nvSpPr>
+        <p:spPr>
+          <a:xfrm>
+            <a:off x="9699681" y="7973568"/>
             <a:ext cx="1617787" cy="329184"/>
           </a:xfrm>
           <a:prstGeom prst="rect">
@@ -8239,13 +8307,13 @@
       </p:sp>
       <p:sp>
         <p:nvSpPr>
-          <p:cNvPr id="114" name="Text 108"/>
-          <p:cNvSpPr/>
-          <p:nvPr/>
-        </p:nvSpPr>
-        <p:spPr>
-          <a:xfrm>
-            <a:off x="11317468" y="7936992"/>
+          <p:cNvPr id="116" name="Text 107"/>
+          <p:cNvSpPr/>
+          <p:nvPr/>
+        </p:nvSpPr>
+        <p:spPr>
+          <a:xfrm>
+            <a:off x="11317468" y="7973568"/>
             <a:ext cx="1617787" cy="329184"/>
           </a:xfrm>
           <a:prstGeom prst="rect">
@@ -8281,13 +8349,13 @@
       </p:sp>
       <p:sp>
         <p:nvSpPr>
-          <p:cNvPr id="115" name="Text 109"/>
-          <p:cNvSpPr/>
-          <p:nvPr/>
-        </p:nvSpPr>
-        <p:spPr>
-          <a:xfrm>
-            <a:off x="12935255" y="7936992"/>
+          <p:cNvPr id="117" name="Text 108"/>
+          <p:cNvSpPr/>
+          <p:nvPr/>
+        </p:nvSpPr>
+        <p:spPr>
+          <a:xfrm>
+            <a:off x="12935255" y="7973568"/>
             <a:ext cx="1617787" cy="329184"/>
           </a:xfrm>
           <a:prstGeom prst="rect">
@@ -8323,13 +8391,13 @@
       </p:sp>
       <p:sp>
         <p:nvSpPr>
-          <p:cNvPr id="116" name="Shape 110"/>
-          <p:cNvSpPr/>
-          <p:nvPr/>
-        </p:nvSpPr>
-        <p:spPr>
-          <a:xfrm>
-            <a:off x="8126913" y="8266176"/>
+          <p:cNvPr id="118" name="Shape 109"/>
+          <p:cNvSpPr/>
+          <p:nvPr/>
+        </p:nvSpPr>
+        <p:spPr>
+          <a:xfrm>
+            <a:off x="8126913" y="8302752"/>
             <a:ext cx="6426129" cy="7315"/>
           </a:xfrm>
           <a:prstGeom prst="rect">
@@ -8348,13 +8416,13 @@
       </p:sp>
       <p:sp>
         <p:nvSpPr>
-          <p:cNvPr id="117" name="Shape 111"/>
-          <p:cNvSpPr/>
-          <p:nvPr/>
-        </p:nvSpPr>
-        <p:spPr>
-          <a:xfrm>
-            <a:off x="9699681" y="8266176"/>
+          <p:cNvPr id="119" name="Shape 110"/>
+          <p:cNvSpPr/>
+          <p:nvPr/>
+        </p:nvSpPr>
+        <p:spPr>
+          <a:xfrm>
+            <a:off x="9699681" y="8302752"/>
             <a:ext cx="1617787" cy="329184"/>
           </a:xfrm>
           <a:prstGeom prst="rect">
@@ -8373,13 +8441,13 @@
       </p:sp>
       <p:sp>
         <p:nvSpPr>
-          <p:cNvPr id="118" name="Text 112"/>
-          <p:cNvSpPr/>
-          <p:nvPr/>
-        </p:nvSpPr>
-        <p:spPr>
-          <a:xfrm>
-            <a:off x="8126913" y="8266176"/>
+          <p:cNvPr id="120" name="Text 111"/>
+          <p:cNvSpPr/>
+          <p:nvPr/>
+        </p:nvSpPr>
+        <p:spPr>
+          <a:xfrm>
+            <a:off x="8126913" y="8302752"/>
             <a:ext cx="1463040" cy="329184"/>
           </a:xfrm>
           <a:prstGeom prst="rect">
@@ -8412,13 +8480,13 @@
       </p:sp>
       <p:sp>
         <p:nvSpPr>
-          <p:cNvPr id="119" name="Text 113"/>
-          <p:cNvSpPr/>
-          <p:nvPr/>
-        </p:nvSpPr>
-        <p:spPr>
-          <a:xfrm>
-            <a:off x="9699681" y="8266176"/>
+          <p:cNvPr id="121" name="Text 112"/>
+          <p:cNvSpPr/>
+          <p:nvPr/>
+        </p:nvSpPr>
+        <p:spPr>
+          <a:xfrm>
+            <a:off x="9699681" y="8302752"/>
             <a:ext cx="1617787" cy="329184"/>
           </a:xfrm>
           <a:prstGeom prst="rect">
@@ -8454,13 +8522,13 @@
       </p:sp>
       <p:sp>
         <p:nvSpPr>
-          <p:cNvPr id="120" name="Text 114"/>
-          <p:cNvSpPr/>
-          <p:nvPr/>
-        </p:nvSpPr>
-        <p:spPr>
-          <a:xfrm>
-            <a:off x="11317468" y="8266176"/>
+          <p:cNvPr id="122" name="Text 113"/>
+          <p:cNvSpPr/>
+          <p:nvPr/>
+        </p:nvSpPr>
+        <p:spPr>
+          <a:xfrm>
+            <a:off x="11317468" y="8302752"/>
             <a:ext cx="1617787" cy="329184"/>
           </a:xfrm>
           <a:prstGeom prst="rect">
@@ -8496,13 +8564,13 @@
       </p:sp>
       <p:sp>
         <p:nvSpPr>
-          <p:cNvPr id="121" name="Text 115"/>
-          <p:cNvSpPr/>
-          <p:nvPr/>
-        </p:nvSpPr>
-        <p:spPr>
-          <a:xfrm>
-            <a:off x="12935255" y="8266176"/>
+          <p:cNvPr id="123" name="Text 114"/>
+          <p:cNvSpPr/>
+          <p:nvPr/>
+        </p:nvSpPr>
+        <p:spPr>
+          <a:xfrm>
+            <a:off x="12935255" y="8302752"/>
             <a:ext cx="1617787" cy="329184"/>
           </a:xfrm>
           <a:prstGeom prst="rect">
@@ -8538,13 +8606,13 @@
       </p:sp>
       <p:sp>
         <p:nvSpPr>
-          <p:cNvPr id="122" name="Shape 116"/>
-          <p:cNvSpPr/>
-          <p:nvPr/>
-        </p:nvSpPr>
-        <p:spPr>
-          <a:xfrm>
-            <a:off x="8126913" y="8595360"/>
+          <p:cNvPr id="124" name="Shape 115"/>
+          <p:cNvSpPr/>
+          <p:nvPr/>
+        </p:nvSpPr>
+        <p:spPr>
+          <a:xfrm>
+            <a:off x="8126913" y="8631936"/>
             <a:ext cx="6426129" cy="7315"/>
           </a:xfrm>
           <a:prstGeom prst="rect">
@@ -8563,13 +8631,13 @@
       </p:sp>
       <p:sp>
         <p:nvSpPr>
-          <p:cNvPr id="123" name="Shape 117"/>
-          <p:cNvSpPr/>
-          <p:nvPr/>
-        </p:nvSpPr>
-        <p:spPr>
-          <a:xfrm>
-            <a:off x="9699681" y="6510528"/>
+          <p:cNvPr id="125" name="Shape 116"/>
+          <p:cNvSpPr/>
+          <p:nvPr/>
+        </p:nvSpPr>
+        <p:spPr>
+          <a:xfrm>
+            <a:off x="9699681" y="6547104"/>
             <a:ext cx="1617787" cy="2084832"/>
           </a:xfrm>
           <a:prstGeom prst="rect">
@@ -8590,13 +8658,13 @@
       </p:sp>
       <p:sp>
         <p:nvSpPr>
-          <p:cNvPr id="124" name="Text 118"/>
-          <p:cNvSpPr/>
-          <p:nvPr/>
-        </p:nvSpPr>
-        <p:spPr>
-          <a:xfrm>
-            <a:off x="8126913" y="8741664"/>
+          <p:cNvPr id="126" name="Text 117"/>
+          <p:cNvSpPr/>
+          <p:nvPr/>
+        </p:nvSpPr>
+        <p:spPr>
+          <a:xfrm>
+            <a:off x="8126913" y="8778240"/>
             <a:ext cx="6426129" cy="548640"/>
           </a:xfrm>
           <a:prstGeom prst="rect">
@@ -8652,13 +8720,13 @@
       </p:sp>
       <p:sp>
         <p:nvSpPr>
-          <p:cNvPr id="125" name="Text 119"/>
-          <p:cNvSpPr/>
-          <p:nvPr/>
-        </p:nvSpPr>
-        <p:spPr>
-          <a:xfrm>
-            <a:off x="8126913" y="9381744"/>
+          <p:cNvPr id="127" name="Text 118"/>
+          <p:cNvSpPr/>
+          <p:nvPr/>
+        </p:nvSpPr>
+        <p:spPr>
+          <a:xfrm>
+            <a:off x="8126913" y="9418320"/>
             <a:ext cx="3855677" cy="237744"/>
           </a:xfrm>
           <a:prstGeom prst="rect">
@@ -8691,13 +8759,13 @@
       </p:sp>
       <p:sp>
         <p:nvSpPr>
-          <p:cNvPr id="126" name="Text 120"/>
-          <p:cNvSpPr/>
-          <p:nvPr/>
-        </p:nvSpPr>
-        <p:spPr>
-          <a:xfrm>
-            <a:off x="11982590" y="9422892"/>
+          <p:cNvPr id="128" name="Text 119"/>
+          <p:cNvSpPr/>
+          <p:nvPr/>
+        </p:nvSpPr>
+        <p:spPr>
+          <a:xfrm>
+            <a:off x="11982590" y="9459468"/>
             <a:ext cx="2570452" cy="201168"/>
           </a:xfrm>
           <a:prstGeom prst="rect">
@@ -8730,13 +8798,13 @@
       </p:sp>
       <p:sp>
         <p:nvSpPr>
-          <p:cNvPr id="127" name="Shape 121"/>
-          <p:cNvSpPr/>
-          <p:nvPr/>
-        </p:nvSpPr>
-        <p:spPr>
-          <a:xfrm>
-            <a:off x="8126913" y="9656064"/>
+          <p:cNvPr id="129" name="Shape 120"/>
+          <p:cNvSpPr/>
+          <p:nvPr/>
+        </p:nvSpPr>
+        <p:spPr>
+          <a:xfrm>
+            <a:off x="8126913" y="9692640"/>
             <a:ext cx="6426129" cy="7315"/>
           </a:xfrm>
           <a:prstGeom prst="rect">
@@ -8755,13 +8823,13 @@
       </p:sp>
       <p:sp>
         <p:nvSpPr>
-          <p:cNvPr id="128" name="Shape 122"/>
-          <p:cNvSpPr/>
-          <p:nvPr/>
-        </p:nvSpPr>
-        <p:spPr>
-          <a:xfrm>
-            <a:off x="8126913" y="9779508"/>
+          <p:cNvPr id="130" name="Shape 121"/>
+          <p:cNvSpPr/>
+          <p:nvPr/>
+        </p:nvSpPr>
+        <p:spPr>
+          <a:xfrm>
+            <a:off x="8126913" y="9816084"/>
             <a:ext cx="841248" cy="201168"/>
           </a:xfrm>
           <a:prstGeom prst="roundRect">
@@ -8782,13 +8850,13 @@
       </p:sp>
       <p:sp>
         <p:nvSpPr>
-          <p:cNvPr id="129" name="Text 123"/>
-          <p:cNvSpPr/>
-          <p:nvPr/>
-        </p:nvSpPr>
-        <p:spPr>
-          <a:xfrm>
-            <a:off x="8126913" y="9779508"/>
+          <p:cNvPr id="131" name="Text 122"/>
+          <p:cNvSpPr/>
+          <p:nvPr/>
+        </p:nvSpPr>
+        <p:spPr>
+          <a:xfrm>
+            <a:off x="8126913" y="9816084"/>
             <a:ext cx="841248" cy="201168"/>
           </a:xfrm>
           <a:prstGeom prst="rect">
@@ -8821,13 +8889,13 @@
       </p:sp>
       <p:sp>
         <p:nvSpPr>
-          <p:cNvPr id="130" name="Text 124"/>
-          <p:cNvSpPr/>
-          <p:nvPr/>
-        </p:nvSpPr>
-        <p:spPr>
-          <a:xfrm>
-            <a:off x="9077889" y="9765792"/>
+          <p:cNvPr id="132" name="Text 123"/>
+          <p:cNvSpPr/>
+          <p:nvPr/>
+        </p:nvSpPr>
+        <p:spPr>
+          <a:xfrm>
+            <a:off x="9077889" y="9802368"/>
             <a:ext cx="5475153" cy="237744"/>
           </a:xfrm>
           <a:prstGeom prst="rect">
@@ -8860,13 +8928,13 @@
       </p:sp>
       <p:sp>
         <p:nvSpPr>
-          <p:cNvPr id="131" name="Shape 125"/>
-          <p:cNvSpPr/>
-          <p:nvPr/>
-        </p:nvSpPr>
-        <p:spPr>
-          <a:xfrm>
-            <a:off x="8126913" y="10040112"/>
+          <p:cNvPr id="133" name="Shape 124"/>
+          <p:cNvSpPr/>
+          <p:nvPr/>
+        </p:nvSpPr>
+        <p:spPr>
+          <a:xfrm>
+            <a:off x="8126913" y="10076688"/>
             <a:ext cx="841248" cy="201168"/>
           </a:xfrm>
           <a:prstGeom prst="roundRect">
@@ -8887,13 +8955,13 @@
       </p:sp>
       <p:sp>
         <p:nvSpPr>
-          <p:cNvPr id="132" name="Text 126"/>
-          <p:cNvSpPr/>
-          <p:nvPr/>
-        </p:nvSpPr>
-        <p:spPr>
-          <a:xfrm>
-            <a:off x="8126913" y="10040112"/>
+          <p:cNvPr id="134" name="Text 125"/>
+          <p:cNvSpPr/>
+          <p:nvPr/>
+        </p:nvSpPr>
+        <p:spPr>
+          <a:xfrm>
+            <a:off x="8126913" y="10076688"/>
             <a:ext cx="841248" cy="201168"/>
           </a:xfrm>
           <a:prstGeom prst="rect">
@@ -8926,13 +8994,13 @@
       </p:sp>
       <p:sp>
         <p:nvSpPr>
-          <p:cNvPr id="133" name="Text 127"/>
-          <p:cNvSpPr/>
-          <p:nvPr/>
-        </p:nvSpPr>
-        <p:spPr>
-          <a:xfrm>
-            <a:off x="9077889" y="10026396"/>
+          <p:cNvPr id="135" name="Text 126"/>
+          <p:cNvSpPr/>
+          <p:nvPr/>
+        </p:nvSpPr>
+        <p:spPr>
+          <a:xfrm>
+            <a:off x="9077889" y="10062972"/>
             <a:ext cx="5475153" cy="237744"/>
           </a:xfrm>
           <a:prstGeom prst="rect">
@@ -8965,13 +9033,13 @@
       </p:sp>
       <p:sp>
         <p:nvSpPr>
-          <p:cNvPr id="134" name="Shape 128"/>
-          <p:cNvSpPr/>
-          <p:nvPr/>
-        </p:nvSpPr>
-        <p:spPr>
-          <a:xfrm>
-            <a:off x="8126913" y="10300716"/>
+          <p:cNvPr id="136" name="Shape 127"/>
+          <p:cNvSpPr/>
+          <p:nvPr/>
+        </p:nvSpPr>
+        <p:spPr>
+          <a:xfrm>
+            <a:off x="8126913" y="10337292"/>
             <a:ext cx="841248" cy="201168"/>
           </a:xfrm>
           <a:prstGeom prst="roundRect">
@@ -8992,13 +9060,13 @@
       </p:sp>
       <p:sp>
         <p:nvSpPr>
-          <p:cNvPr id="135" name="Text 129"/>
-          <p:cNvSpPr/>
-          <p:nvPr/>
-        </p:nvSpPr>
-        <p:spPr>
-          <a:xfrm>
-            <a:off x="8126913" y="10300716"/>
+          <p:cNvPr id="137" name="Text 128"/>
+          <p:cNvSpPr/>
+          <p:nvPr/>
+        </p:nvSpPr>
+        <p:spPr>
+          <a:xfrm>
+            <a:off x="8126913" y="10337292"/>
             <a:ext cx="841248" cy="201168"/>
           </a:xfrm>
           <a:prstGeom prst="rect">
@@ -9031,13 +9099,13 @@
       </p:sp>
       <p:sp>
         <p:nvSpPr>
-          <p:cNvPr id="136" name="Text 130"/>
-          <p:cNvSpPr/>
-          <p:nvPr/>
-        </p:nvSpPr>
-        <p:spPr>
-          <a:xfrm>
-            <a:off x="9077889" y="10287000"/>
+          <p:cNvPr id="138" name="Text 129"/>
+          <p:cNvSpPr/>
+          <p:nvPr/>
+        </p:nvSpPr>
+        <p:spPr>
+          <a:xfrm>
+            <a:off x="9077889" y="10323576"/>
             <a:ext cx="5475153" cy="237744"/>
           </a:xfrm>
           <a:prstGeom prst="rect">
@@ -9070,7 +9138,7 @@
       </p:sp>
       <p:sp>
         <p:nvSpPr>
-          <p:cNvPr id="137" name="Text 131"/>
+          <p:cNvPr id="139" name="Text 130"/>
           <p:cNvSpPr/>
           <p:nvPr/>
         </p:nvSpPr>
@@ -9109,7 +9177,7 @@
       </p:sp>
       <p:sp>
         <p:nvSpPr>
-          <p:cNvPr id="138" name="Shape 132"/>
+          <p:cNvPr id="140" name="Shape 131"/>
           <p:cNvSpPr/>
           <p:nvPr/>
         </p:nvSpPr>
